--- a/HackSprint PPT Presentation.pptx
+++ b/HackSprint PPT Presentation.pptx
@@ -1,52 +1,52 @@
 
 <file path=ppt/presentation.xml><?xml version="1.0" encoding="utf-8"?>
-<p:presentation xmlns:a="http://schemas.openxmlformats.org/drawingml/2006/main" xmlns:r="http://schemas.openxmlformats.org/officeDocument/2006/relationships" xmlns:p="http://schemas.openxmlformats.org/presentationml/2006/main" saveSubsetFonts="1" embedTrueTypeFonts="true">
+<p:presentation xmlns:a="http://schemas.openxmlformats.org/drawingml/2006/main" xmlns:r="http://schemas.openxmlformats.org/officeDocument/2006/relationships" xmlns:p="http://schemas.openxmlformats.org/presentationml/2006/main" embedTrueTypeFonts="1" saveSubsetFonts="1">
   <p:sldMasterIdLst>
     <p:sldMasterId id="2147483648" r:id="rId1"/>
   </p:sldMasterIdLst>
   <p:sldIdLst>
-    <p:sldId id="256" r:id="rId6"/>
-    <p:sldId id="257" r:id="rId7"/>
-    <p:sldId id="258" r:id="rId8"/>
-    <p:sldId id="259" r:id="rId9"/>
-    <p:sldId id="260" r:id="rId10"/>
-    <p:sldId id="261" r:id="rId11"/>
-    <p:sldId id="262" r:id="rId12"/>
+    <p:sldId id="256" r:id="rId2"/>
+    <p:sldId id="257" r:id="rId3"/>
+    <p:sldId id="258" r:id="rId4"/>
+    <p:sldId id="259" r:id="rId5"/>
+    <p:sldId id="260" r:id="rId6"/>
+    <p:sldId id="261" r:id="rId7"/>
+    <p:sldId id="262" r:id="rId8"/>
   </p:sldIdLst>
   <p:sldSz cx="18288000" cy="10287000"/>
   <p:notesSz cx="6858000" cy="9144000"/>
   <p:embeddedFontLst>
     <p:embeddedFont>
-      <p:font typeface="Times New Roman MT" charset="1" panose="02030502070405020303"/>
+      <p:font typeface="Agrandir Wide Bold" panose="020B0604020202020204" charset="0"/>
+      <p:regular r:id="rId9"/>
+    </p:embeddedFont>
+    <p:embeddedFont>
+      <p:font typeface="Open Sauce" panose="020B0604020202020204" charset="0"/>
+      <p:regular r:id="rId10"/>
+    </p:embeddedFont>
+    <p:embeddedFont>
+      <p:font typeface="Open Sauce Bold" panose="020B0604020202020204" charset="0"/>
+      <p:regular r:id="rId11"/>
+    </p:embeddedFont>
+    <p:embeddedFont>
+      <p:font typeface="Open Sauce Medium" panose="020B0604020202020204" charset="0"/>
+      <p:regular r:id="rId12"/>
+    </p:embeddedFont>
+    <p:embeddedFont>
+      <p:font typeface="Playfair Display Semi-Bold" panose="020B0604020202020204" charset="0"/>
       <p:regular r:id="rId13"/>
     </p:embeddedFont>
     <p:embeddedFont>
-      <p:font typeface="Times New Roman MT Italics" charset="1" panose="02030502070405090303"/>
+      <p:font typeface="Times New Roman MT" panose="020B0604020202020204" charset="0"/>
       <p:regular r:id="rId14"/>
     </p:embeddedFont>
     <p:embeddedFont>
-      <p:font typeface="Times New Roman MT Condensed" charset="1" panose="02030506070405020303"/>
+      <p:font typeface="Times New Roman MT Condensed" panose="020B0604020202020204" charset="0"/>
       <p:regular r:id="rId15"/>
     </p:embeddedFont>
     <p:embeddedFont>
-      <p:font typeface="Agrandir Wide Bold" charset="1" panose="00000805000000000000"/>
+      <p:font typeface="Times New Roman MT Italics" panose="020B0604020202020204" charset="0"/>
       <p:regular r:id="rId16"/>
-    </p:embeddedFont>
-    <p:embeddedFont>
-      <p:font typeface="Open Sauce Medium" charset="1" panose="00000600000000000000"/>
-      <p:regular r:id="rId17"/>
-    </p:embeddedFont>
-    <p:embeddedFont>
-      <p:font typeface="Open Sauce Bold" charset="1" panose="00000800000000000000"/>
-      <p:regular r:id="rId18"/>
-    </p:embeddedFont>
-    <p:embeddedFont>
-      <p:font typeface="Open Sauce" charset="1" panose="00000500000000000000"/>
-      <p:regular r:id="rId19"/>
-    </p:embeddedFont>
-    <p:embeddedFont>
-      <p:font typeface="Playfair Display Semi-Bold" charset="1" panose="00000000000000000000"/>
-      <p:regular r:id="rId20"/>
     </p:embeddedFont>
   </p:embeddedFontLst>
   <p:defaultTextStyle>
@@ -144,7 +144,52 @@
       </a:defRPr>
     </a:lvl9pPr>
   </p:defaultTextStyle>
+  <p:extLst>
+    <p:ext uri="{EFAFB233-063F-42B5-8137-9DF3F51BA10A}">
+      <p15:sldGuideLst xmlns:p15="http://schemas.microsoft.com/office/powerpoint/2012/main">
+        <p15:guide id="1" orient="horz" pos="2160">
+          <p15:clr>
+            <a:srgbClr val="A4A3A4"/>
+          </p15:clr>
+        </p15:guide>
+        <p15:guide id="2" pos="2880">
+          <p15:clr>
+            <a:srgbClr val="A4A3A4"/>
+          </p15:clr>
+        </p15:guide>
+      </p15:sldGuideLst>
+    </p:ext>
+  </p:extLst>
 </p:presentation>
+</file>
+
+<file path=ppt/changesInfos/changesInfo1.xml><?xml version="1.0" encoding="utf-8"?>
+<pc:chgInfo xmlns:a="http://schemas.openxmlformats.org/drawingml/2006/main" xmlns:r="http://schemas.openxmlformats.org/officeDocument/2006/relationships" xmlns:ac="http://schemas.microsoft.com/office/drawing/2013/main/command" xmlns:pc="http://schemas.microsoft.com/office/powerpoint/2013/main/command">
+  <pc:docChgLst>
+    <pc:chgData name="vaibhav yadav" userId="bc0b8a45d3ed64dc" providerId="LiveId" clId="{D0279BE2-BAA9-4E0F-B3AE-5A3FFDEB7A16}"/>
+    <pc:docChg chg="modSld">
+      <pc:chgData name="vaibhav yadav" userId="bc0b8a45d3ed64dc" providerId="LiveId" clId="{D0279BE2-BAA9-4E0F-B3AE-5A3FFDEB7A16}" dt="2026-10-03T05:34:16.938" v="0" actId="14100"/>
+      <pc:docMkLst>
+        <pc:docMk/>
+      </pc:docMkLst>
+      <pc:sldChg chg="modSp mod">
+        <pc:chgData name="vaibhav yadav" userId="bc0b8a45d3ed64dc" providerId="LiveId" clId="{D0279BE2-BAA9-4E0F-B3AE-5A3FFDEB7A16}" dt="2026-10-03T05:34:16.938" v="0" actId="14100"/>
+        <pc:sldMkLst>
+          <pc:docMk/>
+          <pc:sldMk cId="0" sldId="256"/>
+        </pc:sldMkLst>
+        <pc:spChg chg="mod">
+          <ac:chgData name="vaibhav yadav" userId="bc0b8a45d3ed64dc" providerId="LiveId" clId="{D0279BE2-BAA9-4E0F-B3AE-5A3FFDEB7A16}" dt="2026-10-03T05:34:16.938" v="0" actId="14100"/>
+          <ac:spMkLst>
+            <pc:docMk/>
+            <pc:sldMk cId="0" sldId="256"/>
+            <ac:spMk id="22" creationId="{00000000-0000-0000-0000-000000000000}"/>
+          </ac:spMkLst>
+        </pc:spChg>
+      </pc:sldChg>
+    </pc:docChg>
+  </pc:docChgLst>
+</pc:chgInfo>
 </file>
 
 <file path=ppt/slideLayouts/slideLayout1.xml><?xml version="1.0" encoding="utf-8"?>
@@ -185,10 +230,9 @@
           <a:lstStyle/>
           <a:p>
             <a:r>
-              <a:rPr lang="en-US" smtClean="0"/>
+              <a:rPr lang="en-US"/>
               <a:t>Click to edit Master title style</a:t>
             </a:r>
-            <a:endParaRPr lang="en-US"/>
           </a:p>
         </p:txBody>
       </p:sp>
@@ -304,10 +348,9 @@
           </a:lstStyle>
           <a:p>
             <a:r>
-              <a:rPr lang="en-US" smtClean="0"/>
+              <a:rPr lang="en-US"/>
               <a:t>Click to edit Master subtitle style</a:t>
             </a:r>
-            <a:endParaRPr lang="en-US"/>
           </a:p>
         </p:txBody>
       </p:sp>
@@ -329,7 +372,7 @@
             <a:fld id="{1D8BD707-D9CF-40AE-B4C6-C98DA3205C09}" type="datetimeFigureOut">
               <a:rPr lang="en-US" smtClean="0"/>
               <a:pPr/>
-              <a:t>8/1/2011</a:t>
+              <a:t>10/3/2026</a:t>
             </a:fld>
             <a:endParaRPr lang="en-US"/>
           </a:p>
@@ -419,10 +462,9 @@
           <a:lstStyle/>
           <a:p>
             <a:r>
-              <a:rPr lang="en-US" smtClean="0"/>
+              <a:rPr lang="en-US"/>
               <a:t>Click to edit Master title style</a:t>
             </a:r>
-            <a:endParaRPr lang="en-US"/>
           </a:p>
         </p:txBody>
       </p:sp>
@@ -443,38 +485,37 @@
           <a:p>
             <a:pPr lvl="0"/>
             <a:r>
-              <a:rPr lang="en-US" smtClean="0"/>
+              <a:rPr lang="en-US"/>
               <a:t>Click to edit Master text styles</a:t>
             </a:r>
           </a:p>
           <a:p>
             <a:pPr lvl="1"/>
             <a:r>
-              <a:rPr lang="en-US" smtClean="0"/>
+              <a:rPr lang="en-US"/>
               <a:t>Second level</a:t>
             </a:r>
           </a:p>
           <a:p>
             <a:pPr lvl="2"/>
             <a:r>
-              <a:rPr lang="en-US" smtClean="0"/>
+              <a:rPr lang="en-US"/>
               <a:t>Third level</a:t>
             </a:r>
           </a:p>
           <a:p>
             <a:pPr lvl="3"/>
             <a:r>
-              <a:rPr lang="en-US" smtClean="0"/>
+              <a:rPr lang="en-US"/>
               <a:t>Fourth level</a:t>
             </a:r>
           </a:p>
           <a:p>
             <a:pPr lvl="4"/>
             <a:r>
-              <a:rPr lang="en-US" smtClean="0"/>
+              <a:rPr lang="en-US"/>
               <a:t>Fifth level</a:t>
             </a:r>
-            <a:endParaRPr lang="en-US"/>
           </a:p>
         </p:txBody>
       </p:sp>
@@ -496,7 +537,7 @@
             <a:fld id="{1D8BD707-D9CF-40AE-B4C6-C98DA3205C09}" type="datetimeFigureOut">
               <a:rPr lang="en-US" smtClean="0"/>
               <a:pPr/>
-              <a:t>8/1/2011</a:t>
+              <a:t>10/3/2026</a:t>
             </a:fld>
             <a:endParaRPr lang="en-US"/>
           </a:p>
@@ -591,10 +632,9 @@
           <a:lstStyle/>
           <a:p>
             <a:r>
-              <a:rPr lang="en-US" smtClean="0"/>
+              <a:rPr lang="en-US"/>
               <a:t>Click to edit Master title style</a:t>
             </a:r>
-            <a:endParaRPr lang="en-US"/>
           </a:p>
         </p:txBody>
       </p:sp>
@@ -620,38 +660,37 @@
           <a:p>
             <a:pPr lvl="0"/>
             <a:r>
-              <a:rPr lang="en-US" smtClean="0"/>
+              <a:rPr lang="en-US"/>
               <a:t>Click to edit Master text styles</a:t>
             </a:r>
           </a:p>
           <a:p>
             <a:pPr lvl="1"/>
             <a:r>
-              <a:rPr lang="en-US" smtClean="0"/>
+              <a:rPr lang="en-US"/>
               <a:t>Second level</a:t>
             </a:r>
           </a:p>
           <a:p>
             <a:pPr lvl="2"/>
             <a:r>
-              <a:rPr lang="en-US" smtClean="0"/>
+              <a:rPr lang="en-US"/>
               <a:t>Third level</a:t>
             </a:r>
           </a:p>
           <a:p>
             <a:pPr lvl="3"/>
             <a:r>
-              <a:rPr lang="en-US" smtClean="0"/>
+              <a:rPr lang="en-US"/>
               <a:t>Fourth level</a:t>
             </a:r>
           </a:p>
           <a:p>
             <a:pPr lvl="4"/>
             <a:r>
-              <a:rPr lang="en-US" smtClean="0"/>
+              <a:rPr lang="en-US"/>
               <a:t>Fifth level</a:t>
             </a:r>
-            <a:endParaRPr lang="en-US"/>
           </a:p>
         </p:txBody>
       </p:sp>
@@ -673,7 +712,7 @@
             <a:fld id="{1D8BD707-D9CF-40AE-B4C6-C98DA3205C09}" type="datetimeFigureOut">
               <a:rPr lang="en-US" smtClean="0"/>
               <a:pPr/>
-              <a:t>8/1/2011</a:t>
+              <a:t>10/3/2026</a:t>
             </a:fld>
             <a:endParaRPr lang="en-US"/>
           </a:p>
@@ -763,10 +802,9 @@
           <a:lstStyle/>
           <a:p>
             <a:r>
-              <a:rPr lang="en-US" smtClean="0"/>
+              <a:rPr lang="en-US"/>
               <a:t>Click to edit Master title style</a:t>
             </a:r>
-            <a:endParaRPr lang="en-US"/>
           </a:p>
         </p:txBody>
       </p:sp>
@@ -787,38 +825,37 @@
           <a:p>
             <a:pPr lvl="0"/>
             <a:r>
-              <a:rPr lang="en-US" smtClean="0"/>
+              <a:rPr lang="en-US"/>
               <a:t>Click to edit Master text styles</a:t>
             </a:r>
           </a:p>
           <a:p>
             <a:pPr lvl="1"/>
             <a:r>
-              <a:rPr lang="en-US" smtClean="0"/>
+              <a:rPr lang="en-US"/>
               <a:t>Second level</a:t>
             </a:r>
           </a:p>
           <a:p>
             <a:pPr lvl="2"/>
             <a:r>
-              <a:rPr lang="en-US" smtClean="0"/>
+              <a:rPr lang="en-US"/>
               <a:t>Third level</a:t>
             </a:r>
           </a:p>
           <a:p>
             <a:pPr lvl="3"/>
             <a:r>
-              <a:rPr lang="en-US" smtClean="0"/>
+              <a:rPr lang="en-US"/>
               <a:t>Fourth level</a:t>
             </a:r>
           </a:p>
           <a:p>
             <a:pPr lvl="4"/>
             <a:r>
-              <a:rPr lang="en-US" smtClean="0"/>
+              <a:rPr lang="en-US"/>
               <a:t>Fifth level</a:t>
             </a:r>
-            <a:endParaRPr lang="en-US"/>
           </a:p>
         </p:txBody>
       </p:sp>
@@ -840,7 +877,7 @@
             <a:fld id="{1D8BD707-D9CF-40AE-B4C6-C98DA3205C09}" type="datetimeFigureOut">
               <a:rPr lang="en-US" smtClean="0"/>
               <a:pPr/>
-              <a:t>8/1/2011</a:t>
+              <a:t>10/3/2026</a:t>
             </a:fld>
             <a:endParaRPr lang="en-US"/>
           </a:p>
@@ -939,10 +976,9 @@
           </a:lstStyle>
           <a:p>
             <a:r>
-              <a:rPr lang="en-US" smtClean="0"/>
+              <a:rPr lang="en-US"/>
               <a:t>Click to edit Master title style</a:t>
             </a:r>
-            <a:endParaRPr lang="en-US"/>
           </a:p>
         </p:txBody>
       </p:sp>
@@ -1059,7 +1095,7 @@
           <a:p>
             <a:pPr lvl="0"/>
             <a:r>
-              <a:rPr lang="en-US" smtClean="0"/>
+              <a:rPr lang="en-US"/>
               <a:t>Click to edit Master text styles</a:t>
             </a:r>
           </a:p>
@@ -1083,7 +1119,7 @@
             <a:fld id="{1D8BD707-D9CF-40AE-B4C6-C98DA3205C09}" type="datetimeFigureOut">
               <a:rPr lang="en-US" smtClean="0"/>
               <a:pPr/>
-              <a:t>8/1/2011</a:t>
+              <a:t>10/3/2026</a:t>
             </a:fld>
             <a:endParaRPr lang="en-US"/>
           </a:p>
@@ -1173,10 +1209,9 @@
           <a:lstStyle/>
           <a:p>
             <a:r>
-              <a:rPr lang="en-US" smtClean="0"/>
+              <a:rPr lang="en-US"/>
               <a:t>Click to edit Master title style</a:t>
             </a:r>
-            <a:endParaRPr lang="en-US"/>
           </a:p>
         </p:txBody>
       </p:sp>
@@ -1230,38 +1265,37 @@
           <a:p>
             <a:pPr lvl="0"/>
             <a:r>
-              <a:rPr lang="en-US" smtClean="0"/>
+              <a:rPr lang="en-US"/>
               <a:t>Click to edit Master text styles</a:t>
             </a:r>
           </a:p>
           <a:p>
             <a:pPr lvl="1"/>
             <a:r>
-              <a:rPr lang="en-US" smtClean="0"/>
+              <a:rPr lang="en-US"/>
               <a:t>Second level</a:t>
             </a:r>
           </a:p>
           <a:p>
             <a:pPr lvl="2"/>
             <a:r>
-              <a:rPr lang="en-US" smtClean="0"/>
+              <a:rPr lang="en-US"/>
               <a:t>Third level</a:t>
             </a:r>
           </a:p>
           <a:p>
             <a:pPr lvl="3"/>
             <a:r>
-              <a:rPr lang="en-US" smtClean="0"/>
+              <a:rPr lang="en-US"/>
               <a:t>Fourth level</a:t>
             </a:r>
           </a:p>
           <a:p>
             <a:pPr lvl="4"/>
             <a:r>
-              <a:rPr lang="en-US" smtClean="0"/>
+              <a:rPr lang="en-US"/>
               <a:t>Fifth level</a:t>
             </a:r>
-            <a:endParaRPr lang="en-US"/>
           </a:p>
         </p:txBody>
       </p:sp>
@@ -1315,38 +1349,37 @@
           <a:p>
             <a:pPr lvl="0"/>
             <a:r>
-              <a:rPr lang="en-US" smtClean="0"/>
+              <a:rPr lang="en-US"/>
               <a:t>Click to edit Master text styles</a:t>
             </a:r>
           </a:p>
           <a:p>
             <a:pPr lvl="1"/>
             <a:r>
-              <a:rPr lang="en-US" smtClean="0"/>
+              <a:rPr lang="en-US"/>
               <a:t>Second level</a:t>
             </a:r>
           </a:p>
           <a:p>
             <a:pPr lvl="2"/>
             <a:r>
-              <a:rPr lang="en-US" smtClean="0"/>
+              <a:rPr lang="en-US"/>
               <a:t>Third level</a:t>
             </a:r>
           </a:p>
           <a:p>
             <a:pPr lvl="3"/>
             <a:r>
-              <a:rPr lang="en-US" smtClean="0"/>
+              <a:rPr lang="en-US"/>
               <a:t>Fourth level</a:t>
             </a:r>
           </a:p>
           <a:p>
             <a:pPr lvl="4"/>
             <a:r>
-              <a:rPr lang="en-US" smtClean="0"/>
+              <a:rPr lang="en-US"/>
               <a:t>Fifth level</a:t>
             </a:r>
-            <a:endParaRPr lang="en-US"/>
           </a:p>
         </p:txBody>
       </p:sp>
@@ -1368,7 +1401,7 @@
             <a:fld id="{1D8BD707-D9CF-40AE-B4C6-C98DA3205C09}" type="datetimeFigureOut">
               <a:rPr lang="en-US" smtClean="0"/>
               <a:pPr/>
-              <a:t>8/1/2011</a:t>
+              <a:t>10/3/2026</a:t>
             </a:fld>
             <a:endParaRPr lang="en-US"/>
           </a:p>
@@ -1462,10 +1495,9 @@
           </a:lstStyle>
           <a:p>
             <a:r>
-              <a:rPr lang="en-US" smtClean="0"/>
+              <a:rPr lang="en-US"/>
               <a:t>Click to edit Master title style</a:t>
             </a:r>
-            <a:endParaRPr lang="en-US"/>
           </a:p>
         </p:txBody>
       </p:sp>
@@ -1528,7 +1560,7 @@
           <a:p>
             <a:pPr lvl="0"/>
             <a:r>
-              <a:rPr lang="en-US" smtClean="0"/>
+              <a:rPr lang="en-US"/>
               <a:t>Click to edit Master text styles</a:t>
             </a:r>
           </a:p>
@@ -1584,38 +1616,37 @@
           <a:p>
             <a:pPr lvl="0"/>
             <a:r>
-              <a:rPr lang="en-US" smtClean="0"/>
+              <a:rPr lang="en-US"/>
               <a:t>Click to edit Master text styles</a:t>
             </a:r>
           </a:p>
           <a:p>
             <a:pPr lvl="1"/>
             <a:r>
-              <a:rPr lang="en-US" smtClean="0"/>
+              <a:rPr lang="en-US"/>
               <a:t>Second level</a:t>
             </a:r>
           </a:p>
           <a:p>
             <a:pPr lvl="2"/>
             <a:r>
-              <a:rPr lang="en-US" smtClean="0"/>
+              <a:rPr lang="en-US"/>
               <a:t>Third level</a:t>
             </a:r>
           </a:p>
           <a:p>
             <a:pPr lvl="3"/>
             <a:r>
-              <a:rPr lang="en-US" smtClean="0"/>
+              <a:rPr lang="en-US"/>
               <a:t>Fourth level</a:t>
             </a:r>
           </a:p>
           <a:p>
             <a:pPr lvl="4"/>
             <a:r>
-              <a:rPr lang="en-US" smtClean="0"/>
+              <a:rPr lang="en-US"/>
               <a:t>Fifth level</a:t>
             </a:r>
-            <a:endParaRPr lang="en-US"/>
           </a:p>
         </p:txBody>
       </p:sp>
@@ -1678,7 +1709,7 @@
           <a:p>
             <a:pPr lvl="0"/>
             <a:r>
-              <a:rPr lang="en-US" smtClean="0"/>
+              <a:rPr lang="en-US"/>
               <a:t>Click to edit Master text styles</a:t>
             </a:r>
           </a:p>
@@ -1734,38 +1765,37 @@
           <a:p>
             <a:pPr lvl="0"/>
             <a:r>
-              <a:rPr lang="en-US" smtClean="0"/>
+              <a:rPr lang="en-US"/>
               <a:t>Click to edit Master text styles</a:t>
             </a:r>
           </a:p>
           <a:p>
             <a:pPr lvl="1"/>
             <a:r>
-              <a:rPr lang="en-US" smtClean="0"/>
+              <a:rPr lang="en-US"/>
               <a:t>Second level</a:t>
             </a:r>
           </a:p>
           <a:p>
             <a:pPr lvl="2"/>
             <a:r>
-              <a:rPr lang="en-US" smtClean="0"/>
+              <a:rPr lang="en-US"/>
               <a:t>Third level</a:t>
             </a:r>
           </a:p>
           <a:p>
             <a:pPr lvl="3"/>
             <a:r>
-              <a:rPr lang="en-US" smtClean="0"/>
+              <a:rPr lang="en-US"/>
               <a:t>Fourth level</a:t>
             </a:r>
           </a:p>
           <a:p>
             <a:pPr lvl="4"/>
             <a:r>
-              <a:rPr lang="en-US" smtClean="0"/>
+              <a:rPr lang="en-US"/>
               <a:t>Fifth level</a:t>
             </a:r>
-            <a:endParaRPr lang="en-US"/>
           </a:p>
         </p:txBody>
       </p:sp>
@@ -1787,7 +1817,7 @@
             <a:fld id="{1D8BD707-D9CF-40AE-B4C6-C98DA3205C09}" type="datetimeFigureOut">
               <a:rPr lang="en-US" smtClean="0"/>
               <a:pPr/>
-              <a:t>8/1/2011</a:t>
+              <a:t>10/3/2026</a:t>
             </a:fld>
             <a:endParaRPr lang="en-US"/>
           </a:p>
@@ -1877,10 +1907,9 @@
           <a:lstStyle/>
           <a:p>
             <a:r>
-              <a:rPr lang="en-US" smtClean="0"/>
+              <a:rPr lang="en-US"/>
               <a:t>Click to edit Master title style</a:t>
             </a:r>
-            <a:endParaRPr lang="en-US"/>
           </a:p>
         </p:txBody>
       </p:sp>
@@ -1902,7 +1931,7 @@
             <a:fld id="{1D8BD707-D9CF-40AE-B4C6-C98DA3205C09}" type="datetimeFigureOut">
               <a:rPr lang="en-US" smtClean="0"/>
               <a:pPr/>
-              <a:t>8/1/2011</a:t>
+              <a:t>10/3/2026</a:t>
             </a:fld>
             <a:endParaRPr lang="en-US"/>
           </a:p>
@@ -1994,7 +2023,7 @@
             <a:fld id="{1D8BD707-D9CF-40AE-B4C6-C98DA3205C09}" type="datetimeFigureOut">
               <a:rPr lang="en-US" smtClean="0"/>
               <a:pPr/>
-              <a:t>8/1/2011</a:t>
+              <a:t>10/3/2026</a:t>
             </a:fld>
             <a:endParaRPr lang="en-US"/>
           </a:p>
@@ -2093,10 +2122,9 @@
           </a:lstStyle>
           <a:p>
             <a:r>
-              <a:rPr lang="en-US" smtClean="0"/>
+              <a:rPr lang="en-US"/>
               <a:t>Click to edit Master title style</a:t>
             </a:r>
-            <a:endParaRPr lang="en-US"/>
           </a:p>
         </p:txBody>
       </p:sp>
@@ -2150,38 +2178,37 @@
           <a:p>
             <a:pPr lvl="0"/>
             <a:r>
-              <a:rPr lang="en-US" smtClean="0"/>
+              <a:rPr lang="en-US"/>
               <a:t>Click to edit Master text styles</a:t>
             </a:r>
           </a:p>
           <a:p>
             <a:pPr lvl="1"/>
             <a:r>
-              <a:rPr lang="en-US" smtClean="0"/>
+              <a:rPr lang="en-US"/>
               <a:t>Second level</a:t>
             </a:r>
           </a:p>
           <a:p>
             <a:pPr lvl="2"/>
             <a:r>
-              <a:rPr lang="en-US" smtClean="0"/>
+              <a:rPr lang="en-US"/>
               <a:t>Third level</a:t>
             </a:r>
           </a:p>
           <a:p>
             <a:pPr lvl="3"/>
             <a:r>
-              <a:rPr lang="en-US" smtClean="0"/>
+              <a:rPr lang="en-US"/>
               <a:t>Fourth level</a:t>
             </a:r>
           </a:p>
           <a:p>
             <a:pPr lvl="4"/>
             <a:r>
-              <a:rPr lang="en-US" smtClean="0"/>
+              <a:rPr lang="en-US"/>
               <a:t>Fifth level</a:t>
             </a:r>
-            <a:endParaRPr lang="en-US"/>
           </a:p>
         </p:txBody>
       </p:sp>
@@ -2244,7 +2271,7 @@
           <a:p>
             <a:pPr lvl="0"/>
             <a:r>
-              <a:rPr lang="en-US" smtClean="0"/>
+              <a:rPr lang="en-US"/>
               <a:t>Click to edit Master text styles</a:t>
             </a:r>
           </a:p>
@@ -2268,7 +2295,7 @@
             <a:fld id="{1D8BD707-D9CF-40AE-B4C6-C98DA3205C09}" type="datetimeFigureOut">
               <a:rPr lang="en-US" smtClean="0"/>
               <a:pPr/>
-              <a:t>8/1/2011</a:t>
+              <a:t>10/3/2026</a:t>
             </a:fld>
             <a:endParaRPr lang="en-US"/>
           </a:p>
@@ -2367,10 +2394,9 @@
           </a:lstStyle>
           <a:p>
             <a:r>
-              <a:rPr lang="en-US" smtClean="0"/>
+              <a:rPr lang="en-US"/>
               <a:t>Click to edit Master title style</a:t>
             </a:r>
-            <a:endParaRPr lang="en-US"/>
           </a:p>
         </p:txBody>
       </p:sp>
@@ -2494,7 +2520,7 @@
           <a:p>
             <a:pPr lvl="0"/>
             <a:r>
-              <a:rPr lang="en-US" smtClean="0"/>
+              <a:rPr lang="en-US"/>
               <a:t>Click to edit Master text styles</a:t>
             </a:r>
           </a:p>
@@ -2518,7 +2544,7 @@
             <a:fld id="{1D8BD707-D9CF-40AE-B4C6-C98DA3205C09}" type="datetimeFigureOut">
               <a:rPr lang="en-US" smtClean="0"/>
               <a:pPr/>
-              <a:t>8/1/2011</a:t>
+              <a:t>10/3/2026</a:t>
             </a:fld>
             <a:endParaRPr lang="en-US"/>
           </a:p>
@@ -2623,10 +2649,9 @@
           <a:lstStyle/>
           <a:p>
             <a:r>
-              <a:rPr lang="en-US" smtClean="0"/>
+              <a:rPr lang="en-US"/>
               <a:t>Click to edit Master title style</a:t>
             </a:r>
-            <a:endParaRPr lang="en-US"/>
           </a:p>
         </p:txBody>
       </p:sp>
@@ -2657,38 +2682,37 @@
           <a:p>
             <a:pPr lvl="0"/>
             <a:r>
-              <a:rPr lang="en-US" smtClean="0"/>
+              <a:rPr lang="en-US"/>
               <a:t>Click to edit Master text styles</a:t>
             </a:r>
           </a:p>
           <a:p>
             <a:pPr lvl="1"/>
             <a:r>
-              <a:rPr lang="en-US" smtClean="0"/>
+              <a:rPr lang="en-US"/>
               <a:t>Second level</a:t>
             </a:r>
           </a:p>
           <a:p>
             <a:pPr lvl="2"/>
             <a:r>
-              <a:rPr lang="en-US" smtClean="0"/>
+              <a:rPr lang="en-US"/>
               <a:t>Third level</a:t>
             </a:r>
           </a:p>
           <a:p>
             <a:pPr lvl="3"/>
             <a:r>
-              <a:rPr lang="en-US" smtClean="0"/>
+              <a:rPr lang="en-US"/>
               <a:t>Fourth level</a:t>
             </a:r>
           </a:p>
           <a:p>
             <a:pPr lvl="4"/>
             <a:r>
-              <a:rPr lang="en-US" smtClean="0"/>
+              <a:rPr lang="en-US"/>
               <a:t>Fifth level</a:t>
             </a:r>
-            <a:endParaRPr lang="en-US"/>
           </a:p>
         </p:txBody>
       </p:sp>
@@ -2728,7 +2752,7 @@
             <a:fld id="{1D8BD707-D9CF-40AE-B4C6-C98DA3205C09}" type="datetimeFigureOut">
               <a:rPr lang="en-US" smtClean="0"/>
               <a:pPr/>
-              <a:t>8/1/2011</a:t>
+              <a:t>10/3/2026</a:t>
             </a:fld>
             <a:endParaRPr lang="en-US"/>
           </a:p>
@@ -3083,7 +3107,7 @@
 </file>
 
 <file path=ppt/slides/slide1.xml><?xml version="1.0" encoding="utf-8"?>
-<p:sld xmlns:p="http://schemas.openxmlformats.org/presentationml/2006/main" xmlns:a="http://schemas.openxmlformats.org/drawingml/2006/main" xmlns:r="http://schemas.openxmlformats.org/officeDocument/2006/relationships">
+<p:sld xmlns:a="http://schemas.openxmlformats.org/drawingml/2006/main" xmlns:r="http://schemas.openxmlformats.org/officeDocument/2006/relationships" xmlns:p="http://schemas.openxmlformats.org/presentationml/2006/main">
   <p:cSld>
     <p:spTree>
       <p:nvGrpSpPr>
@@ -3101,12 +3125,12 @@
       </p:grpSpPr>
       <p:sp>
         <p:nvSpPr>
-          <p:cNvPr name="Freeform 2" id="2"/>
+          <p:cNvPr id="2" name="Freeform 2"/>
           <p:cNvSpPr/>
           <p:nvPr/>
         </p:nvSpPr>
         <p:spPr>
-          <a:xfrm flipH="false" flipV="false" rot="0">
+          <a:xfrm>
             <a:off x="0" y="0"/>
             <a:ext cx="18288000" cy="10287000"/>
           </a:xfrm>
@@ -3115,9 +3139,9 @@
             <a:gdLst/>
             <a:ahLst/>
             <a:cxnLst/>
-            <a:rect r="r" b="b" t="t" l="l"/>
+            <a:rect l="l" t="t" r="r" b="b"/>
             <a:pathLst>
-              <a:path h="10287000" w="18288000">
+              <a:path w="18288000" h="10287000">
                 <a:moveTo>
                   <a:pt x="0" y="0"/>
                 </a:moveTo>
@@ -3144,15 +3168,22 @@
             </a:stretch>
           </a:blipFill>
         </p:spPr>
-      </p:sp>
-      <p:sp>
-        <p:nvSpPr>
-          <p:cNvPr name="Freeform 3" id="3"/>
+        <p:txBody>
+          <a:bodyPr/>
+          <a:lstStyle/>
+          <a:p>
+            <a:endParaRPr lang="en-IN"/>
+          </a:p>
+        </p:txBody>
+      </p:sp>
+      <p:sp>
+        <p:nvSpPr>
+          <p:cNvPr id="3" name="Freeform 3"/>
           <p:cNvSpPr/>
           <p:nvPr/>
         </p:nvSpPr>
         <p:spPr>
-          <a:xfrm flipH="false" flipV="false" rot="0">
+          <a:xfrm>
             <a:off x="5317038" y="-4518398"/>
             <a:ext cx="22188662" cy="18920878"/>
           </a:xfrm>
@@ -3161,9 +3192,9 @@
             <a:gdLst/>
             <a:ahLst/>
             <a:cxnLst/>
-            <a:rect r="r" b="b" t="t" l="l"/>
+            <a:rect l="l" t="t" r="r" b="b"/>
             <a:pathLst>
-              <a:path h="18920878" w="22188662">
+              <a:path w="22188662" h="18920878">
                 <a:moveTo>
                   <a:pt x="0" y="0"/>
                 </a:moveTo>
@@ -3186,19 +3217,26 @@
           <a:blipFill>
             <a:blip r:embed="rId3"/>
             <a:stretch>
-              <a:fillRect l="0" t="0" r="0" b="0"/>
+              <a:fillRect/>
             </a:stretch>
           </a:blipFill>
         </p:spPr>
-      </p:sp>
-      <p:sp>
-        <p:nvSpPr>
-          <p:cNvPr name="Freeform 4" id="4"/>
+        <p:txBody>
+          <a:bodyPr/>
+          <a:lstStyle/>
+          <a:p>
+            <a:endParaRPr lang="en-IN"/>
+          </a:p>
+        </p:txBody>
+      </p:sp>
+      <p:sp>
+        <p:nvSpPr>
+          <p:cNvPr id="4" name="Freeform 4"/>
           <p:cNvSpPr/>
           <p:nvPr/>
         </p:nvSpPr>
         <p:spPr>
-          <a:xfrm flipH="false" flipV="false" rot="0">
+          <a:xfrm>
             <a:off x="1274313" y="307383"/>
             <a:ext cx="14127702" cy="1101598"/>
           </a:xfrm>
@@ -3207,9 +3245,9 @@
             <a:gdLst/>
             <a:ahLst/>
             <a:cxnLst/>
-            <a:rect r="r" b="b" t="t" l="l"/>
+            <a:rect l="l" t="t" r="r" b="b"/>
             <a:pathLst>
-              <a:path h="1101598" w="14127702">
+              <a:path w="14127702" h="1101598">
                 <a:moveTo>
                   <a:pt x="0" y="0"/>
                 </a:moveTo>
@@ -3236,15 +3274,22 @@
             </a:stretch>
           </a:blipFill>
         </p:spPr>
-      </p:sp>
-      <p:sp>
-        <p:nvSpPr>
-          <p:cNvPr name="Freeform 5" id="5"/>
+        <p:txBody>
+          <a:bodyPr/>
+          <a:lstStyle/>
+          <a:p>
+            <a:endParaRPr lang="en-IN"/>
+          </a:p>
+        </p:txBody>
+      </p:sp>
+      <p:sp>
+        <p:nvSpPr>
+          <p:cNvPr id="5" name="Freeform 5"/>
           <p:cNvSpPr/>
           <p:nvPr/>
         </p:nvSpPr>
         <p:spPr>
-          <a:xfrm flipH="false" flipV="false" rot="0">
+          <a:xfrm>
             <a:off x="1591320" y="362859"/>
             <a:ext cx="610238" cy="832142"/>
           </a:xfrm>
@@ -3253,9 +3298,9 @@
             <a:gdLst/>
             <a:ahLst/>
             <a:cxnLst/>
-            <a:rect r="r" b="b" t="t" l="l"/>
+            <a:rect l="l" t="t" r="r" b="b"/>
             <a:pathLst>
-              <a:path h="832142" w="610238">
+              <a:path w="610238" h="832142">
                 <a:moveTo>
                   <a:pt x="0" y="0"/>
                 </a:moveTo>
@@ -3278,19 +3323,26 @@
           <a:blipFill>
             <a:blip r:embed="rId5"/>
             <a:stretch>
-              <a:fillRect l="0" t="0" r="0" b="0"/>
+              <a:fillRect/>
             </a:stretch>
           </a:blipFill>
         </p:spPr>
-      </p:sp>
-      <p:sp>
-        <p:nvSpPr>
-          <p:cNvPr name="Freeform 6" id="6"/>
+        <p:txBody>
+          <a:bodyPr/>
+          <a:lstStyle/>
+          <a:p>
+            <a:endParaRPr lang="en-IN"/>
+          </a:p>
+        </p:txBody>
+      </p:sp>
+      <p:sp>
+        <p:nvSpPr>
+          <p:cNvPr id="6" name="Freeform 6"/>
           <p:cNvSpPr/>
           <p:nvPr/>
         </p:nvSpPr>
         <p:spPr>
-          <a:xfrm flipH="false" flipV="false" rot="0">
+          <a:xfrm>
             <a:off x="4415789" y="372692"/>
             <a:ext cx="901250" cy="901250"/>
           </a:xfrm>
@@ -3299,9 +3351,9 @@
             <a:gdLst/>
             <a:ahLst/>
             <a:cxnLst/>
-            <a:rect r="r" b="b" t="t" l="l"/>
+            <a:rect l="l" t="t" r="r" b="b"/>
             <a:pathLst>
-              <a:path h="901250" w="901250">
+              <a:path w="901250" h="901250">
                 <a:moveTo>
                   <a:pt x="0" y="0"/>
                 </a:moveTo>
@@ -3324,19 +3376,26 @@
           <a:blipFill>
             <a:blip r:embed="rId6"/>
             <a:stretch>
-              <a:fillRect l="0" t="0" r="0" b="0"/>
+              <a:fillRect/>
             </a:stretch>
           </a:blipFill>
         </p:spPr>
-      </p:sp>
-      <p:sp>
-        <p:nvSpPr>
-          <p:cNvPr name="Freeform 7" id="7"/>
+        <p:txBody>
+          <a:bodyPr/>
+          <a:lstStyle/>
+          <a:p>
+            <a:endParaRPr lang="en-IN"/>
+          </a:p>
+        </p:txBody>
+      </p:sp>
+      <p:sp>
+        <p:nvSpPr>
+          <p:cNvPr id="7" name="Freeform 7"/>
           <p:cNvSpPr/>
           <p:nvPr/>
         </p:nvSpPr>
         <p:spPr>
-          <a:xfrm flipH="false" flipV="false" rot="0">
+          <a:xfrm>
             <a:off x="13628758" y="488306"/>
             <a:ext cx="1172861" cy="616220"/>
           </a:xfrm>
@@ -3345,9 +3404,9 @@
             <a:gdLst/>
             <a:ahLst/>
             <a:cxnLst/>
-            <a:rect r="r" b="b" t="t" l="l"/>
+            <a:rect l="l" t="t" r="r" b="b"/>
             <a:pathLst>
-              <a:path h="616220" w="1172861">
+              <a:path w="1172861" h="616220">
                 <a:moveTo>
                   <a:pt x="0" y="0"/>
                 </a:moveTo>
@@ -3370,19 +3429,26 @@
           <a:blipFill>
             <a:blip r:embed="rId7"/>
             <a:stretch>
-              <a:fillRect l="0" t="0" r="0" b="0"/>
+              <a:fillRect/>
             </a:stretch>
           </a:blipFill>
         </p:spPr>
-      </p:sp>
-      <p:sp>
-        <p:nvSpPr>
-          <p:cNvPr name="Freeform 8" id="8"/>
+        <p:txBody>
+          <a:bodyPr/>
+          <a:lstStyle/>
+          <a:p>
+            <a:endParaRPr lang="en-IN"/>
+          </a:p>
+        </p:txBody>
+      </p:sp>
+      <p:sp>
+        <p:nvSpPr>
+          <p:cNvPr id="8" name="Freeform 8"/>
           <p:cNvSpPr/>
           <p:nvPr/>
         </p:nvSpPr>
         <p:spPr>
-          <a:xfrm flipH="false" flipV="false" rot="0">
+          <a:xfrm>
             <a:off x="5926638" y="538306"/>
             <a:ext cx="1721890" cy="626142"/>
           </a:xfrm>
@@ -3391,9 +3457,9 @@
             <a:gdLst/>
             <a:ahLst/>
             <a:cxnLst/>
-            <a:rect r="r" b="b" t="t" l="l"/>
+            <a:rect l="l" t="t" r="r" b="b"/>
             <a:pathLst>
-              <a:path h="626142" w="1721890">
+              <a:path w="1721890" h="626142">
                 <a:moveTo>
                   <a:pt x="0" y="0"/>
                 </a:moveTo>
@@ -3420,15 +3486,22 @@
             </a:stretch>
           </a:blipFill>
         </p:spPr>
-      </p:sp>
-      <p:sp>
-        <p:nvSpPr>
-          <p:cNvPr name="Freeform 9" id="9"/>
+        <p:txBody>
+          <a:bodyPr/>
+          <a:lstStyle/>
+          <a:p>
+            <a:endParaRPr lang="en-IN"/>
+          </a:p>
+        </p:txBody>
+      </p:sp>
+      <p:sp>
+        <p:nvSpPr>
+          <p:cNvPr id="9" name="Freeform 9"/>
           <p:cNvSpPr/>
           <p:nvPr/>
         </p:nvSpPr>
         <p:spPr>
-          <a:xfrm flipH="false" flipV="false" rot="0">
+          <a:xfrm>
             <a:off x="8258128" y="488306"/>
             <a:ext cx="1474047" cy="670021"/>
           </a:xfrm>
@@ -3437,9 +3510,9 @@
             <a:gdLst/>
             <a:ahLst/>
             <a:cxnLst/>
-            <a:rect r="r" b="b" t="t" l="l"/>
+            <a:rect l="l" t="t" r="r" b="b"/>
             <a:pathLst>
-              <a:path h="670021" w="1474047">
+              <a:path w="1474047" h="670021">
                 <a:moveTo>
                   <a:pt x="0" y="0"/>
                 </a:moveTo>
@@ -3466,15 +3539,22 @@
             </a:stretch>
           </a:blipFill>
         </p:spPr>
-      </p:sp>
-      <p:sp>
-        <p:nvSpPr>
-          <p:cNvPr name="Freeform 10" id="10"/>
+        <p:txBody>
+          <a:bodyPr/>
+          <a:lstStyle/>
+          <a:p>
+            <a:endParaRPr lang="en-IN"/>
+          </a:p>
+        </p:txBody>
+      </p:sp>
+      <p:sp>
+        <p:nvSpPr>
+          <p:cNvPr id="10" name="Freeform 10"/>
           <p:cNvSpPr/>
           <p:nvPr/>
         </p:nvSpPr>
         <p:spPr>
-          <a:xfrm flipH="false" flipV="false" rot="0">
+          <a:xfrm>
             <a:off x="10341775" y="488306"/>
             <a:ext cx="2677383" cy="585678"/>
           </a:xfrm>
@@ -3483,9 +3563,9 @@
             <a:gdLst/>
             <a:ahLst/>
             <a:cxnLst/>
-            <a:rect r="r" b="b" t="t" l="l"/>
+            <a:rect l="l" t="t" r="r" b="b"/>
             <a:pathLst>
-              <a:path h="585678" w="2677383">
+              <a:path w="2677383" h="585678">
                 <a:moveTo>
                   <a:pt x="0" y="0"/>
                 </a:moveTo>
@@ -3508,19 +3588,26 @@
           <a:blipFill>
             <a:blip r:embed="rId10"/>
             <a:stretch>
-              <a:fillRect l="0" t="0" r="0" b="0"/>
+              <a:fillRect/>
             </a:stretch>
           </a:blipFill>
         </p:spPr>
-      </p:sp>
-      <p:sp>
-        <p:nvSpPr>
-          <p:cNvPr name="TextBox 11" id="11"/>
-          <p:cNvSpPr txBox="true"/>
+        <p:txBody>
+          <a:bodyPr/>
+          <a:lstStyle/>
+          <a:p>
+            <a:endParaRPr lang="en-IN"/>
+          </a:p>
+        </p:txBody>
+      </p:sp>
+      <p:sp>
+        <p:nvSpPr>
+          <p:cNvPr id="11" name="TextBox 11"/>
+          <p:cNvSpPr txBox="1"/>
           <p:nvPr/>
         </p:nvSpPr>
         <p:spPr>
-          <a:xfrm rot="0">
+          <a:xfrm>
             <a:off x="2149315" y="481156"/>
             <a:ext cx="1655535" cy="461333"/>
           </a:xfrm>
@@ -3529,7 +3616,7 @@
           </a:prstGeom>
         </p:spPr>
         <p:txBody>
-          <a:bodyPr anchor="t" rtlCol="false" tIns="0" lIns="0" bIns="0" rIns="0">
+          <a:bodyPr lIns="0" tIns="0" rIns="0" bIns="0" rtlCol="0" anchor="t">
             <a:spAutoFit/>
           </a:bodyPr>
           <a:lstStyle/>
@@ -3556,12 +3643,12 @@
       </p:sp>
       <p:sp>
         <p:nvSpPr>
-          <p:cNvPr name="TextBox 12" id="12"/>
-          <p:cNvSpPr txBox="true"/>
+          <p:cNvPr id="12" name="TextBox 12"/>
+          <p:cNvSpPr txBox="1"/>
           <p:nvPr/>
         </p:nvSpPr>
         <p:spPr>
-          <a:xfrm rot="0">
+          <a:xfrm>
             <a:off x="2149315" y="833903"/>
             <a:ext cx="1655535" cy="302485"/>
           </a:xfrm>
@@ -3570,12 +3657,12 @@
           </a:prstGeom>
         </p:spPr>
         <p:txBody>
-          <a:bodyPr anchor="t" rtlCol="false" tIns="0" lIns="0" bIns="0" rIns="0">
+          <a:bodyPr lIns="0" tIns="0" rIns="0" bIns="0" rtlCol="0" anchor="t">
             <a:spAutoFit/>
           </a:bodyPr>
           <a:lstStyle/>
           <a:p>
-            <a:pPr algn="l" marL="0" indent="0" lvl="1">
+            <a:pPr marL="0" lvl="1" indent="0" algn="l">
               <a:lnSpc>
                 <a:spcPts val="1153"/>
               </a:lnSpc>
@@ -3584,7 +3671,7 @@
               </a:spcBef>
             </a:pPr>
             <a:r>
-              <a:rPr lang="en-US" sz="823" spc="-16" strike="noStrike" u="none">
+              <a:rPr lang="en-US" sz="823" u="none" strike="noStrike" spc="-16">
                 <a:solidFill>
                   <a:srgbClr val="000000"/>
                 </a:solidFill>
@@ -3600,12 +3687,12 @@
       </p:sp>
       <p:sp>
         <p:nvSpPr>
-          <p:cNvPr name="TextBox 13" id="13"/>
-          <p:cNvSpPr txBox="true"/>
+          <p:cNvPr id="13" name="TextBox 13"/>
+          <p:cNvSpPr txBox="1"/>
           <p:nvPr/>
         </p:nvSpPr>
         <p:spPr>
-          <a:xfrm rot="0">
+          <a:xfrm>
             <a:off x="2149315" y="1098287"/>
             <a:ext cx="1655535" cy="132626"/>
           </a:xfrm>
@@ -3614,12 +3701,12 @@
           </a:prstGeom>
         </p:spPr>
         <p:txBody>
-          <a:bodyPr anchor="t" rtlCol="false" tIns="0" lIns="0" bIns="0" rIns="0">
+          <a:bodyPr lIns="0" tIns="0" rIns="0" bIns="0" rtlCol="0" anchor="t">
             <a:spAutoFit/>
           </a:bodyPr>
           <a:lstStyle/>
           <a:p>
-            <a:pPr algn="l" marL="0" indent="0" lvl="1">
+            <a:pPr marL="0" lvl="1" indent="0" algn="l">
               <a:lnSpc>
                 <a:spcPts val="905"/>
               </a:lnSpc>
@@ -3628,7 +3715,7 @@
               </a:spcBef>
             </a:pPr>
             <a:r>
-              <a:rPr lang="en-US" sz="646" i="true" spc="-12" strike="noStrike" u="none">
+              <a:rPr lang="en-US" sz="646" i="1" u="none" strike="noStrike" spc="-12">
                 <a:solidFill>
                   <a:srgbClr val="000000"/>
                 </a:solidFill>
@@ -3644,12 +3731,12 @@
       </p:sp>
       <p:sp>
         <p:nvSpPr>
-          <p:cNvPr name="Freeform 14" id="14"/>
+          <p:cNvPr id="14" name="Freeform 14"/>
           <p:cNvSpPr/>
           <p:nvPr/>
         </p:nvSpPr>
         <p:spPr>
-          <a:xfrm flipH="false" flipV="false" rot="0">
+          <a:xfrm>
             <a:off x="12144375" y="3869391"/>
             <a:ext cx="6143625" cy="6417609"/>
           </a:xfrm>
@@ -3658,9 +3745,9 @@
             <a:gdLst/>
             <a:ahLst/>
             <a:cxnLst/>
-            <a:rect r="r" b="b" t="t" l="l"/>
+            <a:rect l="l" t="t" r="r" b="b"/>
             <a:pathLst>
-              <a:path h="6417609" w="6143625">
+              <a:path w="6143625" h="6417609">
                 <a:moveTo>
                   <a:pt x="0" y="0"/>
                 </a:moveTo>
@@ -3683,33 +3770,40 @@
           <a:blipFill>
             <a:blip r:embed="rId11"/>
             <a:stretch>
-              <a:fillRect l="0" t="0" r="0" b="-4932"/>
+              <a:fillRect b="-4932"/>
             </a:stretch>
           </a:blipFill>
         </p:spPr>
+        <p:txBody>
+          <a:bodyPr/>
+          <a:lstStyle/>
+          <a:p>
+            <a:endParaRPr lang="en-IN"/>
+          </a:p>
+        </p:txBody>
       </p:sp>
       <p:grpSp>
         <p:nvGrpSpPr>
-          <p:cNvPr name="Group 15" id="15"/>
+          <p:cNvPr id="15" name="Group 15"/>
           <p:cNvGrpSpPr/>
           <p:nvPr/>
         </p:nvGrpSpPr>
         <p:grpSpPr>
-          <a:xfrm rot="0">
-            <a:off x="1028700" y="1828934"/>
-            <a:ext cx="9460393" cy="4694568"/>
-            <a:chOff x="0" y="0"/>
-            <a:chExt cx="12613857" cy="6259424"/>
+          <a:xfrm>
+            <a:off x="1028700" y="1593190"/>
+            <a:ext cx="9460393" cy="4930312"/>
+            <a:chOff x="0" y="-314325"/>
+            <a:chExt cx="12613857" cy="6573749"/>
           </a:xfrm>
         </p:grpSpPr>
         <p:sp>
           <p:nvSpPr>
-            <p:cNvPr name="TextBox 16" id="16"/>
-            <p:cNvSpPr txBox="true"/>
+            <p:cNvPr id="16" name="TextBox 16"/>
+            <p:cNvSpPr txBox="1"/>
             <p:nvPr/>
           </p:nvSpPr>
           <p:spPr>
-            <a:xfrm rot="0">
+            <a:xfrm>
               <a:off x="382399" y="-314325"/>
               <a:ext cx="11904413" cy="3648514"/>
             </a:xfrm>
@@ -3718,7 +3812,7 @@
             </a:prstGeom>
           </p:spPr>
           <p:txBody>
-            <a:bodyPr anchor="t" rtlCol="false" tIns="0" lIns="0" bIns="0" rIns="0">
+            <a:bodyPr lIns="0" tIns="0" rIns="0" bIns="0" rtlCol="0" anchor="t">
               <a:spAutoFit/>
             </a:bodyPr>
             <a:lstStyle/>
@@ -3757,12 +3851,12 @@
         </p:sp>
         <p:sp>
           <p:nvSpPr>
-            <p:cNvPr name="Freeform 17" id="17"/>
+            <p:cNvPr id="17" name="Freeform 17"/>
             <p:cNvSpPr/>
             <p:nvPr/>
           </p:nvSpPr>
           <p:spPr>
-            <a:xfrm flipH="false" flipV="false" rot="0">
+            <a:xfrm>
               <a:off x="2124439" y="2762951"/>
               <a:ext cx="8394485" cy="1047467"/>
             </a:xfrm>
@@ -3771,9 +3865,9 @@
               <a:gdLst/>
               <a:ahLst/>
               <a:cxnLst/>
-              <a:rect r="r" b="b" t="t" l="l"/>
+              <a:rect l="l" t="t" r="r" b="b"/>
               <a:pathLst>
-                <a:path h="1047467" w="8394485">
+                <a:path w="8394485" h="1047467">
                   <a:moveTo>
                     <a:pt x="0" y="0"/>
                   </a:moveTo>
@@ -3796,19 +3890,26 @@
             <a:blipFill>
               <a:blip r:embed="rId12"/>
               <a:stretch>
-                <a:fillRect l="-1933" t="-18309" r="-1581" b="0"/>
+                <a:fillRect l="-1933" t="-18309" r="-1581"/>
               </a:stretch>
             </a:blipFill>
           </p:spPr>
+          <p:txBody>
+            <a:bodyPr/>
+            <a:lstStyle/>
+            <a:p>
+              <a:endParaRPr lang="en-IN"/>
+            </a:p>
+          </p:txBody>
         </p:sp>
         <p:sp>
           <p:nvSpPr>
-            <p:cNvPr name="Freeform 18" id="18"/>
+            <p:cNvPr id="18" name="Freeform 18"/>
             <p:cNvSpPr/>
             <p:nvPr/>
           </p:nvSpPr>
           <p:spPr>
-            <a:xfrm flipH="false" flipV="false" rot="0">
+            <a:xfrm>
               <a:off x="0" y="3795665"/>
               <a:ext cx="12613857" cy="2463759"/>
             </a:xfrm>
@@ -3817,9 +3918,9 @@
               <a:gdLst/>
               <a:ahLst/>
               <a:cxnLst/>
-              <a:rect r="r" b="b" t="t" l="l"/>
+              <a:rect l="l" t="t" r="r" b="b"/>
               <a:pathLst>
-                <a:path h="2463759" w="12613857">
+                <a:path w="12613857" h="2463759">
                   <a:moveTo>
                     <a:pt x="0" y="0"/>
                   </a:moveTo>
@@ -3842,19 +3943,26 @@
             <a:blipFill>
               <a:blip r:embed="rId13"/>
               <a:stretch>
-                <a:fillRect l="0" t="0" r="0" b="0"/>
+                <a:fillRect/>
               </a:stretch>
             </a:blipFill>
           </p:spPr>
+          <p:txBody>
+            <a:bodyPr/>
+            <a:lstStyle/>
+            <a:p>
+              <a:endParaRPr lang="en-IN"/>
+            </a:p>
+          </p:txBody>
         </p:sp>
         <p:sp>
           <p:nvSpPr>
-            <p:cNvPr name="Freeform 19" id="19"/>
+            <p:cNvPr id="19" name="Freeform 19"/>
             <p:cNvSpPr/>
             <p:nvPr/>
           </p:nvSpPr>
           <p:spPr>
-            <a:xfrm flipH="false" flipV="false" rot="0">
+            <a:xfrm>
               <a:off x="3083387" y="4400540"/>
               <a:ext cx="575369" cy="1239256"/>
             </a:xfrm>
@@ -3863,9 +3971,9 @@
               <a:gdLst/>
               <a:ahLst/>
               <a:cxnLst/>
-              <a:rect r="r" b="b" t="t" l="l"/>
+              <a:rect l="l" t="t" r="r" b="b"/>
               <a:pathLst>
-                <a:path h="1239256" w="575369">
+                <a:path w="575369" h="1239256">
                   <a:moveTo>
                     <a:pt x="0" y="0"/>
                   </a:moveTo>
@@ -3888,19 +3996,26 @@
             <a:blipFill>
               <a:blip r:embed="rId14"/>
               <a:stretch>
-                <a:fillRect l="0" t="0" r="0" b="0"/>
+                <a:fillRect/>
               </a:stretch>
             </a:blipFill>
           </p:spPr>
+          <p:txBody>
+            <a:bodyPr/>
+            <a:lstStyle/>
+            <a:p>
+              <a:endParaRPr lang="en-IN"/>
+            </a:p>
+          </p:txBody>
         </p:sp>
         <p:sp>
           <p:nvSpPr>
-            <p:cNvPr name="Freeform 20" id="20"/>
+            <p:cNvPr id="20" name="Freeform 20"/>
             <p:cNvSpPr/>
             <p:nvPr/>
           </p:nvSpPr>
           <p:spPr>
-            <a:xfrm flipH="false" flipV="false" rot="0">
+            <a:xfrm>
               <a:off x="8689546" y="4400540"/>
               <a:ext cx="73765" cy="1239256"/>
             </a:xfrm>
@@ -3909,9 +4024,9 @@
               <a:gdLst/>
               <a:ahLst/>
               <a:cxnLst/>
-              <a:rect r="r" b="b" t="t" l="l"/>
+              <a:rect l="l" t="t" r="r" b="b"/>
               <a:pathLst>
-                <a:path h="1239256" w="73765">
+                <a:path w="73765" h="1239256">
                   <a:moveTo>
                     <a:pt x="0" y="0"/>
                   </a:moveTo>
@@ -3934,19 +4049,26 @@
             <a:blipFill>
               <a:blip r:embed="rId15"/>
               <a:stretch>
-                <a:fillRect l="-20000" t="0" r="-280000" b="0"/>
+                <a:fillRect l="-20000" r="-280000"/>
               </a:stretch>
             </a:blipFill>
           </p:spPr>
+          <p:txBody>
+            <a:bodyPr/>
+            <a:lstStyle/>
+            <a:p>
+              <a:endParaRPr lang="en-IN"/>
+            </a:p>
+          </p:txBody>
         </p:sp>
         <p:sp>
           <p:nvSpPr>
-            <p:cNvPr name="TextBox 21" id="21"/>
-            <p:cNvSpPr txBox="true"/>
+            <p:cNvPr id="21" name="TextBox 21"/>
+            <p:cNvSpPr txBox="1"/>
             <p:nvPr/>
           </p:nvSpPr>
           <p:spPr>
-            <a:xfrm rot="0">
+            <a:xfrm>
               <a:off x="2436968" y="2920863"/>
               <a:ext cx="7221205" cy="818149"/>
             </a:xfrm>
@@ -3955,7 +4077,7 @@
             </a:prstGeom>
           </p:spPr>
           <p:txBody>
-            <a:bodyPr anchor="t" rtlCol="false" tIns="0" lIns="0" bIns="0" rIns="0">
+            <a:bodyPr lIns="0" tIns="0" rIns="0" bIns="0" rtlCol="0" anchor="t">
               <a:spAutoFit/>
             </a:bodyPr>
             <a:lstStyle/>
@@ -3966,7 +4088,7 @@
                 </a:lnSpc>
               </a:pPr>
               <a:r>
-                <a:rPr lang="en-US" sz="3620" b="true">
+                <a:rPr lang="en-US" sz="3620" b="1">
                   <a:solidFill>
                     <a:srgbClr val="004944"/>
                   </a:solidFill>
@@ -3982,21 +4104,21 @@
         </p:sp>
         <p:sp>
           <p:nvSpPr>
-            <p:cNvPr name="TextBox 22" id="22"/>
-            <p:cNvSpPr txBox="true"/>
+            <p:cNvPr id="22" name="TextBox 22"/>
+            <p:cNvSpPr txBox="1"/>
             <p:nvPr/>
           </p:nvSpPr>
           <p:spPr>
-            <a:xfrm rot="0">
-              <a:off x="865827" y="4393311"/>
-              <a:ext cx="1843069" cy="1003207"/>
+            <a:xfrm>
+              <a:off x="382399" y="4393311"/>
+              <a:ext cx="2326497" cy="1003207"/>
             </a:xfrm>
             <a:prstGeom prst="rect">
               <a:avLst/>
             </a:prstGeom>
           </p:spPr>
           <p:txBody>
-            <a:bodyPr anchor="t" rtlCol="false" tIns="0" lIns="0" bIns="0" rIns="0">
+            <a:bodyPr wrap="square" lIns="0" tIns="0" rIns="0" bIns="0" rtlCol="0" anchor="t">
               <a:spAutoFit/>
             </a:bodyPr>
             <a:lstStyle/>
@@ -4007,7 +4129,7 @@
                 </a:lnSpc>
               </a:pPr>
               <a:r>
-                <a:rPr lang="en-US" b="true" sz="4938" spc="-296">
+                <a:rPr lang="en-US" sz="4938" b="1" spc="-296" dirty="0">
                   <a:gradFill>
                     <a:gsLst>
                       <a:gs pos="0">
@@ -4035,12 +4157,12 @@
         </p:sp>
         <p:sp>
           <p:nvSpPr>
-            <p:cNvPr name="TextBox 23" id="23"/>
-            <p:cNvSpPr txBox="true"/>
+            <p:cNvPr id="23" name="TextBox 23"/>
+            <p:cNvSpPr txBox="1"/>
             <p:nvPr/>
           </p:nvSpPr>
           <p:spPr>
-            <a:xfrm rot="0">
+            <a:xfrm>
               <a:off x="4400894" y="4940029"/>
               <a:ext cx="3474638" cy="649134"/>
             </a:xfrm>
@@ -4049,7 +4171,7 @@
             </a:prstGeom>
           </p:spPr>
           <p:txBody>
-            <a:bodyPr anchor="t" rtlCol="false" tIns="0" lIns="0" bIns="0" rIns="0">
+            <a:bodyPr lIns="0" tIns="0" rIns="0" bIns="0" rtlCol="0" anchor="t">
               <a:spAutoFit/>
             </a:bodyPr>
             <a:lstStyle/>
@@ -4060,7 +4182,7 @@
                 </a:lnSpc>
               </a:pPr>
               <a:r>
-                <a:rPr lang="en-US" sz="1644" b="true">
+                <a:rPr lang="en-US" sz="1644" b="1">
                   <a:solidFill>
                     <a:srgbClr val="004944"/>
                   </a:solidFill>
@@ -4076,12 +4198,12 @@
         </p:sp>
         <p:sp>
           <p:nvSpPr>
-            <p:cNvPr name="TextBox 24" id="24"/>
-            <p:cNvSpPr txBox="true"/>
+            <p:cNvPr id="24" name="TextBox 24"/>
+            <p:cNvSpPr txBox="1"/>
             <p:nvPr/>
           </p:nvSpPr>
           <p:spPr>
-            <a:xfrm rot="0">
+            <a:xfrm>
               <a:off x="1047112" y="5438889"/>
               <a:ext cx="1389855" cy="324567"/>
             </a:xfrm>
@@ -4090,7 +4212,7 @@
             </a:prstGeom>
           </p:spPr>
           <p:txBody>
-            <a:bodyPr anchor="t" rtlCol="false" tIns="0" lIns="0" bIns="0" rIns="0">
+            <a:bodyPr lIns="0" tIns="0" rIns="0" bIns="0" rtlCol="0" anchor="t">
               <a:spAutoFit/>
             </a:bodyPr>
             <a:lstStyle/>
@@ -4101,7 +4223,7 @@
                 </a:lnSpc>
               </a:pPr>
               <a:r>
-                <a:rPr lang="en-US" b="true" sz="1602">
+                <a:rPr lang="en-US" sz="1602" b="1" dirty="0">
                   <a:solidFill>
                     <a:srgbClr val="004944"/>
                   </a:solidFill>
@@ -4117,12 +4239,12 @@
         </p:sp>
         <p:sp>
           <p:nvSpPr>
-            <p:cNvPr name="TextBox 25" id="25"/>
-            <p:cNvSpPr txBox="true"/>
+            <p:cNvPr id="25" name="TextBox 25"/>
+            <p:cNvSpPr txBox="1"/>
             <p:nvPr/>
           </p:nvSpPr>
           <p:spPr>
-            <a:xfrm rot="0">
+            <a:xfrm>
               <a:off x="4974964" y="4461918"/>
               <a:ext cx="2296283" cy="348845"/>
             </a:xfrm>
@@ -4131,7 +4253,7 @@
             </a:prstGeom>
           </p:spPr>
           <p:txBody>
-            <a:bodyPr anchor="t" rtlCol="false" tIns="0" lIns="0" bIns="0" rIns="0">
+            <a:bodyPr lIns="0" tIns="0" rIns="0" bIns="0" rtlCol="0" anchor="t">
               <a:spAutoFit/>
             </a:bodyPr>
             <a:lstStyle/>
@@ -4142,7 +4264,7 @@
                 </a:lnSpc>
               </a:pPr>
               <a:r>
-                <a:rPr lang="en-US" b="true" sz="1685">
+                <a:rPr lang="en-US" sz="1685" b="1">
                   <a:solidFill>
                     <a:srgbClr val="004944"/>
                   </a:solidFill>
@@ -4158,12 +4280,12 @@
         </p:sp>
         <p:sp>
           <p:nvSpPr>
-            <p:cNvPr name="TextBox 26" id="26"/>
-            <p:cNvSpPr txBox="true"/>
+            <p:cNvPr id="26" name="TextBox 26"/>
+            <p:cNvSpPr txBox="1"/>
             <p:nvPr/>
           </p:nvSpPr>
           <p:spPr>
-            <a:xfrm rot="0">
+            <a:xfrm>
               <a:off x="10141600" y="4781941"/>
               <a:ext cx="1631569" cy="348845"/>
             </a:xfrm>
@@ -4172,7 +4294,7 @@
             </a:prstGeom>
           </p:spPr>
           <p:txBody>
-            <a:bodyPr anchor="t" rtlCol="false" tIns="0" lIns="0" bIns="0" rIns="0">
+            <a:bodyPr lIns="0" tIns="0" rIns="0" bIns="0" rtlCol="0" anchor="t">
               <a:spAutoFit/>
             </a:bodyPr>
             <a:lstStyle/>
@@ -4183,7 +4305,7 @@
                 </a:lnSpc>
               </a:pPr>
               <a:r>
-                <a:rPr lang="en-US" b="true" sz="1685">
+                <a:rPr lang="en-US" sz="1685" b="1">
                   <a:solidFill>
                     <a:srgbClr val="004944"/>
                   </a:solidFill>
@@ -4199,12 +4321,12 @@
         </p:sp>
         <p:sp>
           <p:nvSpPr>
-            <p:cNvPr name="TextBox 27" id="27"/>
-            <p:cNvSpPr txBox="true"/>
+            <p:cNvPr id="27" name="TextBox 27"/>
+            <p:cNvSpPr txBox="1"/>
             <p:nvPr/>
           </p:nvSpPr>
           <p:spPr>
-            <a:xfrm rot="0">
+            <a:xfrm>
               <a:off x="9416458" y="5168176"/>
               <a:ext cx="2417140" cy="348845"/>
             </a:xfrm>
@@ -4213,7 +4335,7 @@
             </a:prstGeom>
           </p:spPr>
           <p:txBody>
-            <a:bodyPr anchor="t" rtlCol="false" tIns="0" lIns="0" bIns="0" rIns="0">
+            <a:bodyPr lIns="0" tIns="0" rIns="0" bIns="0" rtlCol="0" anchor="t">
               <a:spAutoFit/>
             </a:bodyPr>
             <a:lstStyle/>
@@ -4241,12 +4363,12 @@
       </p:grpSp>
       <p:grpSp>
         <p:nvGrpSpPr>
-          <p:cNvPr name="Group 28" id="28"/>
+          <p:cNvPr id="28" name="Group 28"/>
           <p:cNvGrpSpPr/>
           <p:nvPr/>
         </p:nvGrpSpPr>
         <p:grpSpPr>
-          <a:xfrm rot="0">
+          <a:xfrm>
             <a:off x="1166813" y="8715375"/>
             <a:ext cx="14049375" cy="1085850"/>
             <a:chOff x="0" y="0"/>
@@ -4255,12 +4377,12 @@
         </p:grpSpPr>
         <p:sp>
           <p:nvSpPr>
-            <p:cNvPr name="Freeform 29" id="29"/>
+            <p:cNvPr id="29" name="Freeform 29"/>
             <p:cNvSpPr/>
             <p:nvPr/>
           </p:nvSpPr>
           <p:spPr>
-            <a:xfrm flipH="false" flipV="false" rot="0">
+            <a:xfrm>
               <a:off x="0" y="0"/>
               <a:ext cx="18732500" cy="1447800"/>
             </a:xfrm>
@@ -4269,9 +4391,9 @@
               <a:gdLst/>
               <a:ahLst/>
               <a:cxnLst/>
-              <a:rect r="r" b="b" t="t" l="l"/>
+              <a:rect l="l" t="t" r="r" b="b"/>
               <a:pathLst>
-                <a:path h="1447800" w="18732500">
+                <a:path w="18732500" h="1447800">
                   <a:moveTo>
                     <a:pt x="0" y="0"/>
                   </a:moveTo>
@@ -4298,15 +4420,22 @@
               </a:stretch>
             </a:blipFill>
           </p:spPr>
+          <p:txBody>
+            <a:bodyPr/>
+            <a:lstStyle/>
+            <a:p>
+              <a:endParaRPr lang="en-IN"/>
+            </a:p>
+          </p:txBody>
         </p:sp>
         <p:sp>
           <p:nvSpPr>
-            <p:cNvPr name="Freeform 30" id="30"/>
+            <p:cNvPr id="30" name="Freeform 30"/>
             <p:cNvSpPr/>
             <p:nvPr/>
           </p:nvSpPr>
           <p:spPr>
-            <a:xfrm flipH="false" flipV="false" rot="0">
+            <a:xfrm>
               <a:off x="10927848" y="480123"/>
               <a:ext cx="2629904" cy="575802"/>
             </a:xfrm>
@@ -4315,9 +4444,9 @@
               <a:gdLst/>
               <a:ahLst/>
               <a:cxnLst/>
-              <a:rect r="r" b="b" t="t" l="l"/>
+              <a:rect l="l" t="t" r="r" b="b"/>
               <a:pathLst>
-                <a:path h="575802" w="2629904">
+                <a:path w="2629904" h="575802">
                   <a:moveTo>
                     <a:pt x="0" y="0"/>
                   </a:moveTo>
@@ -4340,19 +4469,26 @@
             <a:blipFill>
               <a:blip r:embed="rId17"/>
               <a:stretch>
-                <a:fillRect l="0" t="0" r="0" b="0"/>
+                <a:fillRect/>
               </a:stretch>
             </a:blipFill>
           </p:spPr>
+          <p:txBody>
+            <a:bodyPr/>
+            <a:lstStyle/>
+            <a:p>
+              <a:endParaRPr lang="en-IN"/>
+            </a:p>
+          </p:txBody>
         </p:sp>
         <p:sp>
           <p:nvSpPr>
-            <p:cNvPr name="TextBox 31" id="31"/>
-            <p:cNvSpPr txBox="true"/>
+            <p:cNvPr id="31" name="TextBox 31"/>
+            <p:cNvSpPr txBox="1"/>
             <p:nvPr/>
           </p:nvSpPr>
           <p:spPr>
-            <a:xfrm rot="0">
+            <a:xfrm>
               <a:off x="1372006" y="226089"/>
               <a:ext cx="1664614" cy="829836"/>
             </a:xfrm>
@@ -4361,7 +4497,7 @@
             </a:prstGeom>
           </p:spPr>
           <p:txBody>
-            <a:bodyPr anchor="t" rtlCol="false" tIns="0" lIns="0" bIns="0" rIns="0">
+            <a:bodyPr lIns="0" tIns="0" rIns="0" bIns="0" rtlCol="0" anchor="t">
               <a:spAutoFit/>
             </a:bodyPr>
             <a:lstStyle/>
@@ -4372,7 +4508,7 @@
                 </a:lnSpc>
               </a:pPr>
               <a:r>
-                <a:rPr lang="en-US" b="true" sz="1840">
+                <a:rPr lang="en-US" sz="1840" b="1">
                   <a:solidFill>
                     <a:srgbClr val="FFFFFF"/>
                   </a:solidFill>
@@ -4388,12 +4524,12 @@
         </p:sp>
         <p:sp>
           <p:nvSpPr>
-            <p:cNvPr name="TextBox 32" id="32"/>
-            <p:cNvSpPr txBox="true"/>
+            <p:cNvPr id="32" name="TextBox 32"/>
+            <p:cNvSpPr txBox="1"/>
             <p:nvPr/>
           </p:nvSpPr>
           <p:spPr>
-            <a:xfrm rot="0">
+            <a:xfrm>
               <a:off x="7172147" y="252779"/>
               <a:ext cx="1742643" cy="766881"/>
             </a:xfrm>
@@ -4402,7 +4538,7 @@
             </a:prstGeom>
           </p:spPr>
           <p:txBody>
-            <a:bodyPr anchor="t" rtlCol="false" tIns="0" lIns="0" bIns="0" rIns="0">
+            <a:bodyPr lIns="0" tIns="0" rIns="0" bIns="0" rtlCol="0" anchor="t">
               <a:spAutoFit/>
             </a:bodyPr>
             <a:lstStyle/>
@@ -4413,7 +4549,7 @@
                 </a:lnSpc>
               </a:pPr>
               <a:r>
-                <a:rPr lang="en-US" sz="1521" b="true">
+                <a:rPr lang="en-US" sz="1521" b="1">
                   <a:solidFill>
                     <a:srgbClr val="FFFFFF"/>
                   </a:solidFill>
@@ -4432,7 +4568,7 @@
                 </a:lnSpc>
               </a:pPr>
               <a:r>
-                <a:rPr lang="en-US" sz="1521" b="true">
+                <a:rPr lang="en-US" sz="1521" b="1">
                   <a:solidFill>
                     <a:srgbClr val="FFFFFF"/>
                   </a:solidFill>
@@ -4448,12 +4584,12 @@
         </p:sp>
         <p:sp>
           <p:nvSpPr>
-            <p:cNvPr name="TextBox 33" id="33"/>
-            <p:cNvSpPr txBox="true"/>
+            <p:cNvPr id="33" name="TextBox 33"/>
+            <p:cNvSpPr txBox="1"/>
             <p:nvPr/>
           </p:nvSpPr>
           <p:spPr>
-            <a:xfrm rot="0">
+            <a:xfrm>
               <a:off x="12429346" y="130153"/>
               <a:ext cx="2139716" cy="292100"/>
             </a:xfrm>
@@ -4462,7 +4598,7 @@
             </a:prstGeom>
           </p:spPr>
           <p:txBody>
-            <a:bodyPr anchor="t" rtlCol="false" tIns="0" lIns="0" bIns="0" rIns="0">
+            <a:bodyPr lIns="0" tIns="0" rIns="0" bIns="0" rtlCol="0" anchor="t">
               <a:spAutoFit/>
             </a:bodyPr>
             <a:lstStyle/>
@@ -4473,7 +4609,7 @@
                 </a:lnSpc>
               </a:pPr>
               <a:r>
-                <a:rPr lang="en-US" b="true" sz="1450">
+                <a:rPr lang="en-US" sz="1450" b="1">
                   <a:solidFill>
                     <a:srgbClr val="FFFFFF"/>
                   </a:solidFill>
@@ -4489,12 +4625,12 @@
         </p:sp>
         <p:sp>
           <p:nvSpPr>
-            <p:cNvPr name="Freeform 34" id="34"/>
+            <p:cNvPr id="34" name="Freeform 34"/>
             <p:cNvSpPr/>
             <p:nvPr/>
           </p:nvSpPr>
           <p:spPr>
-            <a:xfrm flipH="false" flipV="false" rot="0">
+            <a:xfrm>
               <a:off x="14501941" y="232228"/>
               <a:ext cx="721119" cy="983344"/>
             </a:xfrm>
@@ -4503,9 +4639,9 @@
               <a:gdLst/>
               <a:ahLst/>
               <a:cxnLst/>
-              <a:rect r="r" b="b" t="t" l="l"/>
+              <a:rect l="l" t="t" r="r" b="b"/>
               <a:pathLst>
-                <a:path h="983344" w="721119">
+                <a:path w="721119" h="983344">
                   <a:moveTo>
                     <a:pt x="0" y="0"/>
                   </a:moveTo>
@@ -4528,19 +4664,26 @@
             <a:blipFill>
               <a:blip r:embed="rId5"/>
               <a:stretch>
-                <a:fillRect l="0" t="0" r="0" b="0"/>
+                <a:fillRect/>
               </a:stretch>
             </a:blipFill>
           </p:spPr>
+          <p:txBody>
+            <a:bodyPr/>
+            <a:lstStyle/>
+            <a:p>
+              <a:endParaRPr lang="en-IN"/>
+            </a:p>
+          </p:txBody>
         </p:sp>
         <p:sp>
           <p:nvSpPr>
-            <p:cNvPr name="TextBox 35" id="35"/>
-            <p:cNvSpPr txBox="true"/>
+            <p:cNvPr id="35" name="TextBox 35"/>
+            <p:cNvSpPr txBox="1"/>
             <p:nvPr/>
           </p:nvSpPr>
           <p:spPr>
-            <a:xfrm rot="0">
+            <a:xfrm>
               <a:off x="15125170" y="469001"/>
               <a:ext cx="1260579" cy="342900"/>
             </a:xfrm>
@@ -4549,7 +4692,7 @@
             </a:prstGeom>
           </p:spPr>
           <p:txBody>
-            <a:bodyPr anchor="t" rtlCol="false" tIns="0" lIns="0" bIns="0" rIns="0">
+            <a:bodyPr lIns="0" tIns="0" rIns="0" bIns="0" rtlCol="0" anchor="t">
               <a:spAutoFit/>
             </a:bodyPr>
             <a:lstStyle/>
@@ -4576,12 +4719,12 @@
         </p:sp>
         <p:sp>
           <p:nvSpPr>
-            <p:cNvPr name="TextBox 36" id="36"/>
-            <p:cNvSpPr txBox="true"/>
+            <p:cNvPr id="36" name="TextBox 36"/>
+            <p:cNvSpPr txBox="1"/>
             <p:nvPr/>
           </p:nvSpPr>
           <p:spPr>
-            <a:xfrm rot="0">
+            <a:xfrm>
               <a:off x="15125170" y="762871"/>
               <a:ext cx="1956349" cy="333487"/>
             </a:xfrm>
@@ -4590,12 +4733,12 @@
             </a:prstGeom>
           </p:spPr>
           <p:txBody>
-            <a:bodyPr anchor="t" rtlCol="false" tIns="0" lIns="0" bIns="0" rIns="0">
+            <a:bodyPr lIns="0" tIns="0" rIns="0" bIns="0" rtlCol="0" anchor="t">
               <a:spAutoFit/>
             </a:bodyPr>
             <a:lstStyle/>
             <a:p>
-              <a:pPr algn="l" marL="0" indent="0" lvl="1">
+              <a:pPr marL="0" lvl="1" indent="0" algn="l">
                 <a:lnSpc>
                   <a:spcPts val="1021"/>
                 </a:lnSpc>
@@ -4604,7 +4747,7 @@
                 </a:spcBef>
               </a:pPr>
               <a:r>
-                <a:rPr lang="en-US" sz="729" spc="-14" strike="noStrike" u="none">
+                <a:rPr lang="en-US" sz="729" u="none" strike="noStrike" spc="-14">
                   <a:solidFill>
                     <a:srgbClr val="FFFFFF"/>
                   </a:solidFill>
@@ -4620,12 +4763,12 @@
         </p:sp>
         <p:sp>
           <p:nvSpPr>
-            <p:cNvPr name="TextBox 37" id="37"/>
-            <p:cNvSpPr txBox="true"/>
+            <p:cNvPr id="37" name="TextBox 37"/>
+            <p:cNvSpPr txBox="1"/>
             <p:nvPr/>
           </p:nvSpPr>
           <p:spPr>
-            <a:xfrm rot="0">
+            <a:xfrm>
               <a:off x="15125170" y="1075295"/>
               <a:ext cx="1956349" cy="138570"/>
             </a:xfrm>
@@ -4634,12 +4777,12 @@
             </a:prstGeom>
           </p:spPr>
           <p:txBody>
-            <a:bodyPr anchor="t" rtlCol="false" tIns="0" lIns="0" bIns="0" rIns="0">
+            <a:bodyPr lIns="0" tIns="0" rIns="0" bIns="0" rtlCol="0" anchor="t">
               <a:spAutoFit/>
             </a:bodyPr>
             <a:lstStyle/>
             <a:p>
-              <a:pPr algn="l" marL="0" indent="0" lvl="1">
+              <a:pPr marL="0" lvl="1" indent="0" algn="l">
                 <a:lnSpc>
                   <a:spcPts val="802"/>
                 </a:lnSpc>
@@ -4648,7 +4791,7 @@
                 </a:spcBef>
               </a:pPr>
               <a:r>
-                <a:rPr lang="en-US" sz="573" i="true" spc="-11" strike="noStrike" u="none">
+                <a:rPr lang="en-US" sz="573" i="1" u="none" strike="noStrike" spc="-11">
                   <a:solidFill>
                     <a:srgbClr val="FFFFFF"/>
                   </a:solidFill>
@@ -4665,12 +4808,12 @@
       </p:grpSp>
       <p:sp>
         <p:nvSpPr>
-          <p:cNvPr name="TextBox 38" id="38"/>
-          <p:cNvSpPr txBox="true"/>
+          <p:cNvPr id="38" name="TextBox 38"/>
+          <p:cNvSpPr txBox="1"/>
           <p:nvPr/>
         </p:nvSpPr>
         <p:spPr>
-          <a:xfrm rot="0">
+          <a:xfrm>
             <a:off x="1591320" y="6523502"/>
             <a:ext cx="2051923" cy="1676400"/>
           </a:xfrm>
@@ -4679,7 +4822,7 @@
           </a:prstGeom>
         </p:spPr>
         <p:txBody>
-          <a:bodyPr anchor="t" rtlCol="false" tIns="0" lIns="0" bIns="0" rIns="0">
+          <a:bodyPr lIns="0" tIns="0" rIns="0" bIns="0" rtlCol="0" anchor="t">
             <a:spAutoFit/>
           </a:bodyPr>
           <a:lstStyle/>
@@ -4690,7 +4833,7 @@
               </a:lnSpc>
             </a:pPr>
             <a:r>
-              <a:rPr lang="en-US" b="true" sz="2502">
+              <a:rPr lang="en-US" sz="2502" b="1">
                 <a:solidFill>
                   <a:srgbClr val="000000"/>
                 </a:solidFill>
@@ -4708,6 +4851,15 @@
                 <a:spcPts val="2283"/>
               </a:lnSpc>
             </a:pPr>
+            <a:endParaRPr lang="en-US" sz="2502" b="1">
+              <a:solidFill>
+                <a:srgbClr val="000000"/>
+              </a:solidFill>
+              <a:latin typeface="Playfair Display Semi-Bold"/>
+              <a:ea typeface="Playfair Display Semi-Bold"/>
+              <a:cs typeface="Playfair Display Semi-Bold"/>
+              <a:sym typeface="Playfair Display Semi-Bold"/>
+            </a:endParaRPr>
           </a:p>
           <a:p>
             <a:pPr algn="just">
@@ -4716,7 +4868,7 @@
               </a:lnSpc>
             </a:pPr>
             <a:r>
-              <a:rPr lang="en-US" b="true" sz="2502">
+              <a:rPr lang="en-US" sz="2502" b="1">
                 <a:solidFill>
                   <a:srgbClr val="000000"/>
                 </a:solidFill>
@@ -4734,6 +4886,15 @@
                 <a:spcPts val="2283"/>
               </a:lnSpc>
             </a:pPr>
+            <a:endParaRPr lang="en-US" sz="2502" b="1">
+              <a:solidFill>
+                <a:srgbClr val="000000"/>
+              </a:solidFill>
+              <a:latin typeface="Playfair Display Semi-Bold"/>
+              <a:ea typeface="Playfair Display Semi-Bold"/>
+              <a:cs typeface="Playfair Display Semi-Bold"/>
+              <a:sym typeface="Playfair Display Semi-Bold"/>
+            </a:endParaRPr>
           </a:p>
           <a:p>
             <a:pPr algn="just">
@@ -4745,7 +4906,7 @@
               </a:spcBef>
             </a:pPr>
             <a:r>
-              <a:rPr lang="en-US" b="true" sz="2302">
+              <a:rPr lang="en-US" sz="2302" b="1">
                 <a:solidFill>
                   <a:srgbClr val="000000"/>
                 </a:solidFill>
@@ -4768,7 +4929,7 @@
 </file>
 
 <file path=ppt/slides/slide2.xml><?xml version="1.0" encoding="utf-8"?>
-<p:sld xmlns:p="http://schemas.openxmlformats.org/presentationml/2006/main" xmlns:a="http://schemas.openxmlformats.org/drawingml/2006/main" xmlns:r="http://schemas.openxmlformats.org/officeDocument/2006/relationships">
+<p:sld xmlns:a="http://schemas.openxmlformats.org/drawingml/2006/main" xmlns:r="http://schemas.openxmlformats.org/officeDocument/2006/relationships" xmlns:p="http://schemas.openxmlformats.org/presentationml/2006/main">
   <p:cSld>
     <p:spTree>
       <p:nvGrpSpPr>
@@ -4786,12 +4947,12 @@
       </p:grpSpPr>
       <p:sp>
         <p:nvSpPr>
-          <p:cNvPr name="Freeform 2" id="2"/>
+          <p:cNvPr id="2" name="Freeform 2"/>
           <p:cNvSpPr/>
           <p:nvPr/>
         </p:nvSpPr>
         <p:spPr>
-          <a:xfrm flipH="false" flipV="false" rot="0">
+          <a:xfrm>
             <a:off x="0" y="0"/>
             <a:ext cx="18288000" cy="10287000"/>
           </a:xfrm>
@@ -4800,9 +4961,9 @@
             <a:gdLst/>
             <a:ahLst/>
             <a:cxnLst/>
-            <a:rect r="r" b="b" t="t" l="l"/>
+            <a:rect l="l" t="t" r="r" b="b"/>
             <a:pathLst>
-              <a:path h="10287000" w="18288000">
+              <a:path w="18288000" h="10287000">
                 <a:moveTo>
                   <a:pt x="0" y="0"/>
                 </a:moveTo>
@@ -4829,15 +4990,22 @@
             </a:stretch>
           </a:blipFill>
         </p:spPr>
-      </p:sp>
-      <p:sp>
-        <p:nvSpPr>
-          <p:cNvPr name="Freeform 3" id="3"/>
+        <p:txBody>
+          <a:bodyPr/>
+          <a:lstStyle/>
+          <a:p>
+            <a:endParaRPr lang="en-IN"/>
+          </a:p>
+        </p:txBody>
+      </p:sp>
+      <p:sp>
+        <p:nvSpPr>
+          <p:cNvPr id="3" name="Freeform 3"/>
           <p:cNvSpPr/>
           <p:nvPr/>
         </p:nvSpPr>
         <p:spPr>
-          <a:xfrm flipH="false" flipV="false" rot="0">
+          <a:xfrm>
             <a:off x="5317038" y="-4518398"/>
             <a:ext cx="22188662" cy="18920878"/>
           </a:xfrm>
@@ -4846,9 +5014,9 @@
             <a:gdLst/>
             <a:ahLst/>
             <a:cxnLst/>
-            <a:rect r="r" b="b" t="t" l="l"/>
+            <a:rect l="l" t="t" r="r" b="b"/>
             <a:pathLst>
-              <a:path h="18920878" w="22188662">
+              <a:path w="22188662" h="18920878">
                 <a:moveTo>
                   <a:pt x="0" y="0"/>
                 </a:moveTo>
@@ -4871,19 +5039,26 @@
           <a:blipFill>
             <a:blip r:embed="rId3"/>
             <a:stretch>
-              <a:fillRect l="0" t="0" r="0" b="0"/>
+              <a:fillRect/>
             </a:stretch>
           </a:blipFill>
         </p:spPr>
-      </p:sp>
-      <p:sp>
-        <p:nvSpPr>
-          <p:cNvPr name="TextBox 4" id="4"/>
-          <p:cNvSpPr txBox="true"/>
+        <p:txBody>
+          <a:bodyPr/>
+          <a:lstStyle/>
+          <a:p>
+            <a:endParaRPr lang="en-IN"/>
+          </a:p>
+        </p:txBody>
+      </p:sp>
+      <p:sp>
+        <p:nvSpPr>
+          <p:cNvPr id="4" name="TextBox 4"/>
+          <p:cNvSpPr txBox="1"/>
           <p:nvPr/>
         </p:nvSpPr>
         <p:spPr>
-          <a:xfrm rot="0">
+          <a:xfrm>
             <a:off x="1028700" y="838200"/>
             <a:ext cx="7685837" cy="1704975"/>
           </a:xfrm>
@@ -4892,7 +5067,7 @@
           </a:prstGeom>
         </p:spPr>
         <p:txBody>
-          <a:bodyPr anchor="t" rtlCol="false" tIns="0" lIns="0" bIns="0" rIns="0">
+          <a:bodyPr lIns="0" tIns="0" rIns="0" bIns="0" rtlCol="0" anchor="t">
             <a:spAutoFit/>
           </a:bodyPr>
           <a:lstStyle/>
@@ -4938,7 +5113,7 @@
 </file>
 
 <file path=ppt/slides/slide3.xml><?xml version="1.0" encoding="utf-8"?>
-<p:sld xmlns:p="http://schemas.openxmlformats.org/presentationml/2006/main" xmlns:a="http://schemas.openxmlformats.org/drawingml/2006/main" xmlns:r="http://schemas.openxmlformats.org/officeDocument/2006/relationships">
+<p:sld xmlns:a="http://schemas.openxmlformats.org/drawingml/2006/main" xmlns:r="http://schemas.openxmlformats.org/officeDocument/2006/relationships" xmlns:p="http://schemas.openxmlformats.org/presentationml/2006/main">
   <p:cSld>
     <p:spTree>
       <p:nvGrpSpPr>
@@ -4956,12 +5131,12 @@
       </p:grpSpPr>
       <p:sp>
         <p:nvSpPr>
-          <p:cNvPr name="Freeform 2" id="2"/>
+          <p:cNvPr id="2" name="Freeform 2"/>
           <p:cNvSpPr/>
           <p:nvPr/>
         </p:nvSpPr>
         <p:spPr>
-          <a:xfrm flipH="false" flipV="false" rot="0">
+          <a:xfrm>
             <a:off x="0" y="0"/>
             <a:ext cx="18288000" cy="10287000"/>
           </a:xfrm>
@@ -4970,9 +5145,9 @@
             <a:gdLst/>
             <a:ahLst/>
             <a:cxnLst/>
-            <a:rect r="r" b="b" t="t" l="l"/>
+            <a:rect l="l" t="t" r="r" b="b"/>
             <a:pathLst>
-              <a:path h="10287000" w="18288000">
+              <a:path w="18288000" h="10287000">
                 <a:moveTo>
                   <a:pt x="0" y="0"/>
                 </a:moveTo>
@@ -4999,15 +5174,22 @@
             </a:stretch>
           </a:blipFill>
         </p:spPr>
-      </p:sp>
-      <p:sp>
-        <p:nvSpPr>
-          <p:cNvPr name="Freeform 3" id="3"/>
+        <p:txBody>
+          <a:bodyPr/>
+          <a:lstStyle/>
+          <a:p>
+            <a:endParaRPr lang="en-IN"/>
+          </a:p>
+        </p:txBody>
+      </p:sp>
+      <p:sp>
+        <p:nvSpPr>
+          <p:cNvPr id="3" name="Freeform 3"/>
           <p:cNvSpPr/>
           <p:nvPr/>
         </p:nvSpPr>
         <p:spPr>
-          <a:xfrm flipH="false" flipV="false" rot="0">
+          <a:xfrm>
             <a:off x="5317038" y="-4518398"/>
             <a:ext cx="22188662" cy="18920878"/>
           </a:xfrm>
@@ -5016,9 +5198,9 @@
             <a:gdLst/>
             <a:ahLst/>
             <a:cxnLst/>
-            <a:rect r="r" b="b" t="t" l="l"/>
+            <a:rect l="l" t="t" r="r" b="b"/>
             <a:pathLst>
-              <a:path h="18920878" w="22188662">
+              <a:path w="22188662" h="18920878">
                 <a:moveTo>
                   <a:pt x="0" y="0"/>
                 </a:moveTo>
@@ -5041,19 +5223,26 @@
           <a:blipFill>
             <a:blip r:embed="rId3"/>
             <a:stretch>
-              <a:fillRect l="0" t="0" r="0" b="0"/>
+              <a:fillRect/>
             </a:stretch>
           </a:blipFill>
         </p:spPr>
-      </p:sp>
-      <p:sp>
-        <p:nvSpPr>
-          <p:cNvPr name="TextBox 4" id="4"/>
-          <p:cNvSpPr txBox="true"/>
+        <p:txBody>
+          <a:bodyPr/>
+          <a:lstStyle/>
+          <a:p>
+            <a:endParaRPr lang="en-IN"/>
+          </a:p>
+        </p:txBody>
+      </p:sp>
+      <p:sp>
+        <p:nvSpPr>
+          <p:cNvPr id="4" name="TextBox 4"/>
+          <p:cNvSpPr txBox="1"/>
           <p:nvPr/>
         </p:nvSpPr>
         <p:spPr>
-          <a:xfrm rot="0">
+          <a:xfrm>
             <a:off x="1028700" y="838200"/>
             <a:ext cx="13222815" cy="1704975"/>
           </a:xfrm>
@@ -5062,7 +5251,7 @@
           </a:prstGeom>
         </p:spPr>
         <p:txBody>
-          <a:bodyPr anchor="t" rtlCol="false" tIns="0" lIns="0" bIns="0" rIns="0">
+          <a:bodyPr lIns="0" tIns="0" rIns="0" bIns="0" rtlCol="0" anchor="t">
             <a:spAutoFit/>
           </a:bodyPr>
           <a:lstStyle/>
@@ -5108,7 +5297,7 @@
 </file>
 
 <file path=ppt/slides/slide4.xml><?xml version="1.0" encoding="utf-8"?>
-<p:sld xmlns:p="http://schemas.openxmlformats.org/presentationml/2006/main" xmlns:a="http://schemas.openxmlformats.org/drawingml/2006/main" xmlns:r="http://schemas.openxmlformats.org/officeDocument/2006/relationships">
+<p:sld xmlns:a="http://schemas.openxmlformats.org/drawingml/2006/main" xmlns:r="http://schemas.openxmlformats.org/officeDocument/2006/relationships" xmlns:p="http://schemas.openxmlformats.org/presentationml/2006/main">
   <p:cSld>
     <p:spTree>
       <p:nvGrpSpPr>
@@ -5126,12 +5315,12 @@
       </p:grpSpPr>
       <p:sp>
         <p:nvSpPr>
-          <p:cNvPr name="Freeform 2" id="2"/>
+          <p:cNvPr id="2" name="Freeform 2"/>
           <p:cNvSpPr/>
           <p:nvPr/>
         </p:nvSpPr>
         <p:spPr>
-          <a:xfrm flipH="false" flipV="false" rot="0">
+          <a:xfrm>
             <a:off x="0" y="0"/>
             <a:ext cx="18288000" cy="10287000"/>
           </a:xfrm>
@@ -5140,9 +5329,9 @@
             <a:gdLst/>
             <a:ahLst/>
             <a:cxnLst/>
-            <a:rect r="r" b="b" t="t" l="l"/>
+            <a:rect l="l" t="t" r="r" b="b"/>
             <a:pathLst>
-              <a:path h="10287000" w="18288000">
+              <a:path w="18288000" h="10287000">
                 <a:moveTo>
                   <a:pt x="0" y="0"/>
                 </a:moveTo>
@@ -5169,15 +5358,22 @@
             </a:stretch>
           </a:blipFill>
         </p:spPr>
-      </p:sp>
-      <p:sp>
-        <p:nvSpPr>
-          <p:cNvPr name="Freeform 3" id="3"/>
+        <p:txBody>
+          <a:bodyPr/>
+          <a:lstStyle/>
+          <a:p>
+            <a:endParaRPr lang="en-IN"/>
+          </a:p>
+        </p:txBody>
+      </p:sp>
+      <p:sp>
+        <p:nvSpPr>
+          <p:cNvPr id="3" name="Freeform 3"/>
           <p:cNvSpPr/>
           <p:nvPr/>
         </p:nvSpPr>
         <p:spPr>
-          <a:xfrm flipH="false" flipV="false" rot="0">
+          <a:xfrm>
             <a:off x="5317038" y="-4518398"/>
             <a:ext cx="22188662" cy="18920878"/>
           </a:xfrm>
@@ -5186,9 +5382,9 @@
             <a:gdLst/>
             <a:ahLst/>
             <a:cxnLst/>
-            <a:rect r="r" b="b" t="t" l="l"/>
+            <a:rect l="l" t="t" r="r" b="b"/>
             <a:pathLst>
-              <a:path h="18920878" w="22188662">
+              <a:path w="22188662" h="18920878">
                 <a:moveTo>
                   <a:pt x="0" y="0"/>
                 </a:moveTo>
@@ -5211,10 +5407,17 @@
           <a:blipFill>
             <a:blip r:embed="rId3"/>
             <a:stretch>
-              <a:fillRect l="0" t="0" r="0" b="0"/>
+              <a:fillRect/>
             </a:stretch>
           </a:blipFill>
         </p:spPr>
+        <p:txBody>
+          <a:bodyPr/>
+          <a:lstStyle/>
+          <a:p>
+            <a:endParaRPr lang="en-IN"/>
+          </a:p>
+        </p:txBody>
       </p:sp>
     </p:spTree>
   </p:cSld>
@@ -5225,7 +5428,7 @@
 </file>
 
 <file path=ppt/slides/slide5.xml><?xml version="1.0" encoding="utf-8"?>
-<p:sld xmlns:p="http://schemas.openxmlformats.org/presentationml/2006/main" xmlns:a="http://schemas.openxmlformats.org/drawingml/2006/main" xmlns:r="http://schemas.openxmlformats.org/officeDocument/2006/relationships">
+<p:sld xmlns:a="http://schemas.openxmlformats.org/drawingml/2006/main" xmlns:r="http://schemas.openxmlformats.org/officeDocument/2006/relationships" xmlns:p="http://schemas.openxmlformats.org/presentationml/2006/main">
   <p:cSld>
     <p:spTree>
       <p:nvGrpSpPr>
@@ -5243,12 +5446,12 @@
       </p:grpSpPr>
       <p:sp>
         <p:nvSpPr>
-          <p:cNvPr name="Freeform 2" id="2"/>
+          <p:cNvPr id="2" name="Freeform 2"/>
           <p:cNvSpPr/>
           <p:nvPr/>
         </p:nvSpPr>
         <p:spPr>
-          <a:xfrm flipH="false" flipV="false" rot="0">
+          <a:xfrm>
             <a:off x="0" y="0"/>
             <a:ext cx="18288000" cy="10287000"/>
           </a:xfrm>
@@ -5257,9 +5460,9 @@
             <a:gdLst/>
             <a:ahLst/>
             <a:cxnLst/>
-            <a:rect r="r" b="b" t="t" l="l"/>
+            <a:rect l="l" t="t" r="r" b="b"/>
             <a:pathLst>
-              <a:path h="10287000" w="18288000">
+              <a:path w="18288000" h="10287000">
                 <a:moveTo>
                   <a:pt x="0" y="0"/>
                 </a:moveTo>
@@ -5286,15 +5489,22 @@
             </a:stretch>
           </a:blipFill>
         </p:spPr>
-      </p:sp>
-      <p:sp>
-        <p:nvSpPr>
-          <p:cNvPr name="Freeform 3" id="3"/>
+        <p:txBody>
+          <a:bodyPr/>
+          <a:lstStyle/>
+          <a:p>
+            <a:endParaRPr lang="en-IN"/>
+          </a:p>
+        </p:txBody>
+      </p:sp>
+      <p:sp>
+        <p:nvSpPr>
+          <p:cNvPr id="3" name="Freeform 3"/>
           <p:cNvSpPr/>
           <p:nvPr/>
         </p:nvSpPr>
         <p:spPr>
-          <a:xfrm flipH="false" flipV="false" rot="0">
+          <a:xfrm>
             <a:off x="5317038" y="-4518398"/>
             <a:ext cx="22188662" cy="18920878"/>
           </a:xfrm>
@@ -5303,9 +5513,9 @@
             <a:gdLst/>
             <a:ahLst/>
             <a:cxnLst/>
-            <a:rect r="r" b="b" t="t" l="l"/>
+            <a:rect l="l" t="t" r="r" b="b"/>
             <a:pathLst>
-              <a:path h="18920878" w="22188662">
+              <a:path w="22188662" h="18920878">
                 <a:moveTo>
                   <a:pt x="0" y="0"/>
                 </a:moveTo>
@@ -5328,19 +5538,26 @@
           <a:blipFill>
             <a:blip r:embed="rId3"/>
             <a:stretch>
-              <a:fillRect l="0" t="0" r="0" b="0"/>
+              <a:fillRect/>
             </a:stretch>
           </a:blipFill>
         </p:spPr>
-      </p:sp>
-      <p:sp>
-        <p:nvSpPr>
-          <p:cNvPr name="TextBox 4" id="4"/>
-          <p:cNvSpPr txBox="true"/>
+        <p:txBody>
+          <a:bodyPr/>
+          <a:lstStyle/>
+          <a:p>
+            <a:endParaRPr lang="en-IN"/>
+          </a:p>
+        </p:txBody>
+      </p:sp>
+      <p:sp>
+        <p:nvSpPr>
+          <p:cNvPr id="4" name="TextBox 4"/>
+          <p:cNvSpPr txBox="1"/>
           <p:nvPr/>
         </p:nvSpPr>
         <p:spPr>
-          <a:xfrm rot="0">
+          <a:xfrm>
             <a:off x="1028700" y="838200"/>
             <a:ext cx="13222815" cy="1704975"/>
           </a:xfrm>
@@ -5349,7 +5566,7 @@
           </a:prstGeom>
         </p:spPr>
         <p:txBody>
-          <a:bodyPr anchor="t" rtlCol="false" tIns="0" lIns="0" bIns="0" rIns="0">
+          <a:bodyPr lIns="0" tIns="0" rIns="0" bIns="0" rtlCol="0" anchor="t">
             <a:spAutoFit/>
           </a:bodyPr>
           <a:lstStyle/>
@@ -5395,7 +5612,7 @@
 </file>
 
 <file path=ppt/slides/slide6.xml><?xml version="1.0" encoding="utf-8"?>
-<p:sld xmlns:p="http://schemas.openxmlformats.org/presentationml/2006/main" xmlns:a="http://schemas.openxmlformats.org/drawingml/2006/main" xmlns:r="http://schemas.openxmlformats.org/officeDocument/2006/relationships">
+<p:sld xmlns:a="http://schemas.openxmlformats.org/drawingml/2006/main" xmlns:r="http://schemas.openxmlformats.org/officeDocument/2006/relationships" xmlns:p="http://schemas.openxmlformats.org/presentationml/2006/main">
   <p:cSld>
     <p:spTree>
       <p:nvGrpSpPr>
@@ -5413,12 +5630,12 @@
       </p:grpSpPr>
       <p:sp>
         <p:nvSpPr>
-          <p:cNvPr name="Freeform 2" id="2"/>
+          <p:cNvPr id="2" name="Freeform 2"/>
           <p:cNvSpPr/>
           <p:nvPr/>
         </p:nvSpPr>
         <p:spPr>
-          <a:xfrm flipH="false" flipV="false" rot="0">
+          <a:xfrm>
             <a:off x="0" y="0"/>
             <a:ext cx="18288000" cy="10287000"/>
           </a:xfrm>
@@ -5427,9 +5644,9 @@
             <a:gdLst/>
             <a:ahLst/>
             <a:cxnLst/>
-            <a:rect r="r" b="b" t="t" l="l"/>
+            <a:rect l="l" t="t" r="r" b="b"/>
             <a:pathLst>
-              <a:path h="10287000" w="18288000">
+              <a:path w="18288000" h="10287000">
                 <a:moveTo>
                   <a:pt x="0" y="0"/>
                 </a:moveTo>
@@ -5456,15 +5673,22 @@
             </a:stretch>
           </a:blipFill>
         </p:spPr>
-      </p:sp>
-      <p:sp>
-        <p:nvSpPr>
-          <p:cNvPr name="Freeform 3" id="3"/>
+        <p:txBody>
+          <a:bodyPr/>
+          <a:lstStyle/>
+          <a:p>
+            <a:endParaRPr lang="en-IN"/>
+          </a:p>
+        </p:txBody>
+      </p:sp>
+      <p:sp>
+        <p:nvSpPr>
+          <p:cNvPr id="3" name="Freeform 3"/>
           <p:cNvSpPr/>
           <p:nvPr/>
         </p:nvSpPr>
         <p:spPr>
-          <a:xfrm flipH="false" flipV="false" rot="0">
+          <a:xfrm>
             <a:off x="5317038" y="-4518398"/>
             <a:ext cx="22188662" cy="18920878"/>
           </a:xfrm>
@@ -5473,9 +5697,9 @@
             <a:gdLst/>
             <a:ahLst/>
             <a:cxnLst/>
-            <a:rect r="r" b="b" t="t" l="l"/>
+            <a:rect l="l" t="t" r="r" b="b"/>
             <a:pathLst>
-              <a:path h="18920878" w="22188662">
+              <a:path w="22188662" h="18920878">
                 <a:moveTo>
                   <a:pt x="0" y="0"/>
                 </a:moveTo>
@@ -5498,19 +5722,26 @@
           <a:blipFill>
             <a:blip r:embed="rId3"/>
             <a:stretch>
-              <a:fillRect l="0" t="0" r="0" b="0"/>
+              <a:fillRect/>
             </a:stretch>
           </a:blipFill>
         </p:spPr>
-      </p:sp>
-      <p:sp>
-        <p:nvSpPr>
-          <p:cNvPr name="TextBox 4" id="4"/>
-          <p:cNvSpPr txBox="true"/>
+        <p:txBody>
+          <a:bodyPr/>
+          <a:lstStyle/>
+          <a:p>
+            <a:endParaRPr lang="en-IN"/>
+          </a:p>
+        </p:txBody>
+      </p:sp>
+      <p:sp>
+        <p:nvSpPr>
+          <p:cNvPr id="4" name="TextBox 4"/>
+          <p:cNvSpPr txBox="1"/>
           <p:nvPr/>
         </p:nvSpPr>
         <p:spPr>
-          <a:xfrm rot="0">
+          <a:xfrm>
             <a:off x="1028700" y="866775"/>
             <a:ext cx="10751308" cy="1393326"/>
           </a:xfrm>
@@ -5519,7 +5750,7 @@
           </a:prstGeom>
         </p:spPr>
         <p:txBody>
-          <a:bodyPr anchor="t" rtlCol="false" tIns="0" lIns="0" bIns="0" rIns="0">
+          <a:bodyPr lIns="0" tIns="0" rIns="0" bIns="0" rtlCol="0" anchor="t">
             <a:spAutoFit/>
           </a:bodyPr>
           <a:lstStyle/>
@@ -5565,7 +5796,7 @@
 </file>
 
 <file path=ppt/slides/slide7.xml><?xml version="1.0" encoding="utf-8"?>
-<p:sld xmlns:p="http://schemas.openxmlformats.org/presentationml/2006/main" xmlns:a="http://schemas.openxmlformats.org/drawingml/2006/main" xmlns:r="http://schemas.openxmlformats.org/officeDocument/2006/relationships">
+<p:sld xmlns:a="http://schemas.openxmlformats.org/drawingml/2006/main" xmlns:r="http://schemas.openxmlformats.org/officeDocument/2006/relationships" xmlns:p="http://schemas.openxmlformats.org/presentationml/2006/main">
   <p:cSld>
     <p:spTree>
       <p:nvGrpSpPr>
@@ -5583,12 +5814,12 @@
       </p:grpSpPr>
       <p:sp>
         <p:nvSpPr>
-          <p:cNvPr name="Freeform 2" id="2"/>
+          <p:cNvPr id="2" name="Freeform 2"/>
           <p:cNvSpPr/>
           <p:nvPr/>
         </p:nvSpPr>
         <p:spPr>
-          <a:xfrm flipH="false" flipV="false" rot="0">
+          <a:xfrm>
             <a:off x="0" y="0"/>
             <a:ext cx="18288000" cy="10287000"/>
           </a:xfrm>
@@ -5597,9 +5828,9 @@
             <a:gdLst/>
             <a:ahLst/>
             <a:cxnLst/>
-            <a:rect r="r" b="b" t="t" l="l"/>
+            <a:rect l="l" t="t" r="r" b="b"/>
             <a:pathLst>
-              <a:path h="10287000" w="18288000">
+              <a:path w="18288000" h="10287000">
                 <a:moveTo>
                   <a:pt x="0" y="0"/>
                 </a:moveTo>
@@ -5626,15 +5857,22 @@
             </a:stretch>
           </a:blipFill>
         </p:spPr>
-      </p:sp>
-      <p:sp>
-        <p:nvSpPr>
-          <p:cNvPr name="Freeform 3" id="3"/>
+        <p:txBody>
+          <a:bodyPr/>
+          <a:lstStyle/>
+          <a:p>
+            <a:endParaRPr lang="en-IN"/>
+          </a:p>
+        </p:txBody>
+      </p:sp>
+      <p:sp>
+        <p:nvSpPr>
+          <p:cNvPr id="3" name="Freeform 3"/>
           <p:cNvSpPr/>
           <p:nvPr/>
         </p:nvSpPr>
         <p:spPr>
-          <a:xfrm flipH="false" flipV="false" rot="0">
+          <a:xfrm>
             <a:off x="5317038" y="-4518398"/>
             <a:ext cx="22188662" cy="18920878"/>
           </a:xfrm>
@@ -5643,9 +5881,9 @@
             <a:gdLst/>
             <a:ahLst/>
             <a:cxnLst/>
-            <a:rect r="r" b="b" t="t" l="l"/>
+            <a:rect l="l" t="t" r="r" b="b"/>
             <a:pathLst>
-              <a:path h="18920878" w="22188662">
+              <a:path w="22188662" h="18920878">
                 <a:moveTo>
                   <a:pt x="0" y="0"/>
                 </a:moveTo>
@@ -5668,19 +5906,26 @@
           <a:blipFill>
             <a:blip r:embed="rId3"/>
             <a:stretch>
-              <a:fillRect l="0" t="0" r="0" b="0"/>
+              <a:fillRect/>
             </a:stretch>
           </a:blipFill>
         </p:spPr>
-      </p:sp>
-      <p:sp>
-        <p:nvSpPr>
-          <p:cNvPr name="TextBox 4" id="4"/>
-          <p:cNvSpPr txBox="true"/>
+        <p:txBody>
+          <a:bodyPr/>
+          <a:lstStyle/>
+          <a:p>
+            <a:endParaRPr lang="en-IN"/>
+          </a:p>
+        </p:txBody>
+      </p:sp>
+      <p:sp>
+        <p:nvSpPr>
+          <p:cNvPr id="4" name="TextBox 4"/>
+          <p:cNvSpPr txBox="1"/>
           <p:nvPr/>
         </p:nvSpPr>
         <p:spPr>
-          <a:xfrm rot="0">
+          <a:xfrm>
             <a:off x="1028700" y="866775"/>
             <a:ext cx="5533771" cy="1393326"/>
           </a:xfrm>
@@ -5689,7 +5934,7 @@
           </a:prstGeom>
         </p:spPr>
         <p:txBody>
-          <a:bodyPr anchor="t" rtlCol="false" tIns="0" lIns="0" bIns="0" rIns="0">
+          <a:bodyPr lIns="0" tIns="0" rIns="0" bIns="0" rtlCol="0" anchor="t">
             <a:spAutoFit/>
           </a:bodyPr>
           <a:lstStyle/>
